--- a/PPTs/L5-Exercises ANS.pptx
+++ b/PPTs/L5-Exercises ANS.pptx
@@ -968,43 +968,7 @@
         <p:txBody>
           <a:bodyPr/>
           <a:lstStyle/>
-          <a:p>
-            <a:r>
-              <a:rPr lang="en-GB" b="0" i="0" dirty="0">
-                <a:effectLst/>
-                <a:latin typeface="fkGroteskNeue"/>
-              </a:rPr>
-              <a:t>So, the average of 2, 7, 5, 6, and 8 is 5.6.</a:t>
-            </a:r>
-          </a:p>
-          <a:p>
-            <a:r>
-              <a:rPr lang="en-GB" b="0" i="0" dirty="0">
-                <a:effectLst/>
-                <a:latin typeface="fkGroteskNeue"/>
-              </a:rPr>
-              <a:t>The average of the numbers 2, 7, 5, 9, and 4 is 5.4.</a:t>
-            </a:r>
-          </a:p>
-          <a:p>
-            <a:r>
-              <a:rPr lang="en-GB" b="0" i="0" dirty="0">
-                <a:effectLst/>
-                <a:latin typeface="fkGroteskNeue"/>
-              </a:rPr>
-              <a:t>The average of the numbers 2, 8, 1, 9, and 4 is 4.8.</a:t>
-            </a:r>
-          </a:p>
-          <a:p>
-            <a:r>
-              <a:rPr lang="en-GB" b="0" i="0" dirty="0">
-                <a:effectLst/>
-                <a:latin typeface="fkGroteskNeue"/>
-              </a:rPr>
-              <a:t>The average of the numbers 3, 12, 1, 9, and 7 is 6.4.</a:t>
-            </a:r>
-            <a:endParaRPr lang="en-SE" dirty="0"/>
-          </a:p>
+          <a:p/>
         </p:txBody>
       </p:sp>
     </p:spTree>
@@ -1081,43 +1045,7 @@
         <p:txBody>
           <a:bodyPr/>
           <a:lstStyle/>
-          <a:p>
-            <a:r>
-              <a:rPr lang="en-GB" b="0" i="0" dirty="0">
-                <a:effectLst/>
-                <a:latin typeface="fkGroteskNeue"/>
-              </a:rPr>
-              <a:t>So, the average of 2, 7, 5, 6, and 8 is 5.6.</a:t>
-            </a:r>
-          </a:p>
-          <a:p>
-            <a:r>
-              <a:rPr lang="en-GB" b="0" i="0" dirty="0">
-                <a:effectLst/>
-                <a:latin typeface="fkGroteskNeue"/>
-              </a:rPr>
-              <a:t>The average of the numbers 2, 7, 5, 9, and 4 is 5.4.</a:t>
-            </a:r>
-          </a:p>
-          <a:p>
-            <a:r>
-              <a:rPr lang="en-GB" b="0" i="0" dirty="0">
-                <a:effectLst/>
-                <a:latin typeface="fkGroteskNeue"/>
-              </a:rPr>
-              <a:t>The average of the numbers 2, 8, 1, 9, and 4 is 4.8.</a:t>
-            </a:r>
-          </a:p>
-          <a:p>
-            <a:r>
-              <a:rPr lang="en-GB" b="0" i="0" dirty="0">
-                <a:effectLst/>
-                <a:latin typeface="fkGroteskNeue"/>
-              </a:rPr>
-              <a:t>The average of the numbers 3, 12, 1, 9, and 7 is 6.4.</a:t>
-            </a:r>
-            <a:endParaRPr lang="en-SE" dirty="0"/>
-          </a:p>
+          <a:p/>
         </p:txBody>
       </p:sp>
     </p:spTree>
@@ -1194,43 +1122,7 @@
         <p:txBody>
           <a:bodyPr/>
           <a:lstStyle/>
-          <a:p>
-            <a:r>
-              <a:rPr lang="en-GB" b="0" i="0" dirty="0">
-                <a:effectLst/>
-                <a:latin typeface="fkGroteskNeue"/>
-              </a:rPr>
-              <a:t>So, the average of 2, 7, 5, 6, and 8 is 5.6.</a:t>
-            </a:r>
-          </a:p>
-          <a:p>
-            <a:r>
-              <a:rPr lang="en-GB" b="0" i="0" dirty="0">
-                <a:effectLst/>
-                <a:latin typeface="fkGroteskNeue"/>
-              </a:rPr>
-              <a:t>The average of the numbers 2, 7, 5, 9, and 4 is 5.4.</a:t>
-            </a:r>
-          </a:p>
-          <a:p>
-            <a:r>
-              <a:rPr lang="en-GB" b="0" i="0" dirty="0">
-                <a:effectLst/>
-                <a:latin typeface="fkGroteskNeue"/>
-              </a:rPr>
-              <a:t>The average of the numbers 2, 8, 1, 9, and 4 is 4.8.</a:t>
-            </a:r>
-          </a:p>
-          <a:p>
-            <a:r>
-              <a:rPr lang="en-GB" b="0" i="0" dirty="0">
-                <a:effectLst/>
-                <a:latin typeface="fkGroteskNeue"/>
-              </a:rPr>
-              <a:t>The average of the numbers 3, 12, 1, 9, and 7 is 6.4.</a:t>
-            </a:r>
-            <a:endParaRPr lang="en-SE" dirty="0"/>
-          </a:p>
+          <a:p/>
         </p:txBody>
       </p:sp>
     </p:spTree>
@@ -1307,43 +1199,7 @@
         <p:txBody>
           <a:bodyPr/>
           <a:lstStyle/>
-          <a:p>
-            <a:r>
-              <a:rPr lang="en-GB" b="0" i="0" dirty="0">
-                <a:effectLst/>
-                <a:latin typeface="fkGroteskNeue"/>
-              </a:rPr>
-              <a:t>So, the average of 2, 7, 5, 6, and 8 is 5.6.</a:t>
-            </a:r>
-          </a:p>
-          <a:p>
-            <a:r>
-              <a:rPr lang="en-GB" b="0" i="0" dirty="0">
-                <a:effectLst/>
-                <a:latin typeface="fkGroteskNeue"/>
-              </a:rPr>
-              <a:t>The average of the numbers 2, 7, 5, 9, and 4 is 5.4.</a:t>
-            </a:r>
-          </a:p>
-          <a:p>
-            <a:r>
-              <a:rPr lang="en-GB" b="0" i="0" dirty="0">
-                <a:effectLst/>
-                <a:latin typeface="fkGroteskNeue"/>
-              </a:rPr>
-              <a:t>The average of the numbers 2, 8, 1, 9, and 4 is 4.8.</a:t>
-            </a:r>
-          </a:p>
-          <a:p>
-            <a:r>
-              <a:rPr lang="en-GB" b="0" i="0" dirty="0">
-                <a:effectLst/>
-                <a:latin typeface="fkGroteskNeue"/>
-              </a:rPr>
-              <a:t>The average of the numbers 3, 12, 1, 9, and 7 is 6.4.</a:t>
-            </a:r>
-            <a:endParaRPr lang="en-SE" dirty="0"/>
-          </a:p>
+          <a:p/>
         </p:txBody>
       </p:sp>
     </p:spTree>
@@ -1420,43 +1276,7 @@
         <p:txBody>
           <a:bodyPr/>
           <a:lstStyle/>
-          <a:p>
-            <a:r>
-              <a:rPr lang="en-GB" b="0" i="0" dirty="0">
-                <a:effectLst/>
-                <a:latin typeface="fkGroteskNeue"/>
-              </a:rPr>
-              <a:t>So, the average of 2, 7, 5, 6, and 8 is 5.6.</a:t>
-            </a:r>
-          </a:p>
-          <a:p>
-            <a:r>
-              <a:rPr lang="en-GB" b="0" i="0" dirty="0">
-                <a:effectLst/>
-                <a:latin typeface="fkGroteskNeue"/>
-              </a:rPr>
-              <a:t>The average of the numbers 2, 7, 5, 9, and 4 is 5.4.</a:t>
-            </a:r>
-          </a:p>
-          <a:p>
-            <a:r>
-              <a:rPr lang="en-GB" b="0" i="0" dirty="0">
-                <a:effectLst/>
-                <a:latin typeface="fkGroteskNeue"/>
-              </a:rPr>
-              <a:t>The average of the numbers 2, 8, 1, 9, and 4 is 4.8.</a:t>
-            </a:r>
-          </a:p>
-          <a:p>
-            <a:r>
-              <a:rPr lang="en-GB" b="0" i="0" dirty="0">
-                <a:effectLst/>
-                <a:latin typeface="fkGroteskNeue"/>
-              </a:rPr>
-              <a:t>The average of the numbers 3, 12, 1, 9, and 7 is 6.4.</a:t>
-            </a:r>
-            <a:endParaRPr lang="en-SE" dirty="0"/>
-          </a:p>
+          <a:p/>
         </p:txBody>
       </p:sp>
     </p:spTree>
@@ -1533,43 +1353,7 @@
         <p:txBody>
           <a:bodyPr/>
           <a:lstStyle/>
-          <a:p>
-            <a:r>
-              <a:rPr lang="en-GB" b="0" i="0" dirty="0">
-                <a:effectLst/>
-                <a:latin typeface="fkGroteskNeue"/>
-              </a:rPr>
-              <a:t>So, the average of 2, 7, 5, 6, and 8 is 5.6.</a:t>
-            </a:r>
-          </a:p>
-          <a:p>
-            <a:r>
-              <a:rPr lang="en-GB" b="0" i="0" dirty="0">
-                <a:effectLst/>
-                <a:latin typeface="fkGroteskNeue"/>
-              </a:rPr>
-              <a:t>The average of the numbers 2, 7, 5, 9, and 4 is 5.4.</a:t>
-            </a:r>
-          </a:p>
-          <a:p>
-            <a:r>
-              <a:rPr lang="en-GB" b="0" i="0" dirty="0">
-                <a:effectLst/>
-                <a:latin typeface="fkGroteskNeue"/>
-              </a:rPr>
-              <a:t>The average of the numbers 2, 8, 1, 9, and 4 is 4.8.</a:t>
-            </a:r>
-          </a:p>
-          <a:p>
-            <a:r>
-              <a:rPr lang="en-GB" b="0" i="0" dirty="0">
-                <a:effectLst/>
-                <a:latin typeface="fkGroteskNeue"/>
-              </a:rPr>
-              <a:t>The average of the numbers 3, 12, 1, 9, and 7 is 6.4.</a:t>
-            </a:r>
-            <a:endParaRPr lang="en-SE" dirty="0"/>
-          </a:p>
+          <a:p/>
         </p:txBody>
       </p:sp>
     </p:spTree>
@@ -4613,8 +4397,8 @@
           <p:nvPr/>
         </p:nvGraphicFramePr>
         <p:xfrm>
-          <a:off x="4191000" y="2362200"/>
-          <a:ext cx="4057622" cy="2377440"/>
+          <a:off x="3911287" y="2362200"/>
+          <a:ext cx="4337335" cy="2377440"/>
         </p:xfrm>
         <a:graphic>
           <a:graphicData uri="http://schemas.openxmlformats.org/drawingml/2006/table">
@@ -4623,7 +4407,7 @@
                 <a:tableStyleId>{5C22544A-7EE6-4342-B048-85BDC9FD1C3A}</a:tableStyleId>
               </a:tblPr>
               <a:tblGrid>
-                <a:gridCol w="320287">
+                <a:gridCol w="600000">
                   <a:extLst>
                     <a:ext uri="{9D8B030D-6E8A-4147-A177-3AD203B41FA5}">
                       <a16:colId xmlns:a16="http://schemas.microsoft.com/office/drawing/2014/main" val="3897766631"/>
@@ -5387,8 +5171,8 @@
           </p:nvPr>
         </p:nvGraphicFramePr>
         <p:xfrm>
-          <a:off x="4269322" y="872701"/>
-          <a:ext cx="4057622" cy="2651760"/>
+          <a:off x="3989609" y="872701"/>
+          <a:ext cx="4337335" cy="2651760"/>
         </p:xfrm>
         <a:graphic>
           <a:graphicData uri="http://schemas.openxmlformats.org/drawingml/2006/table">
@@ -5397,7 +5181,7 @@
                 <a:tableStyleId>{5C22544A-7EE6-4342-B048-85BDC9FD1C3A}</a:tableStyleId>
               </a:tblPr>
               <a:tblGrid>
-                <a:gridCol w="320287">
+                <a:gridCol w="600000">
                   <a:extLst>
                     <a:ext uri="{9D8B030D-6E8A-4147-A177-3AD203B41FA5}">
                       <a16:colId xmlns:a16="http://schemas.microsoft.com/office/drawing/2014/main" val="3897766631"/>
@@ -6593,7 +6377,7 @@
             </a:r>
             <a:r>
               <a:rPr lang="en-GB" dirty="0"/>
-              <a:t>, draw the Gantt chart and calculate the average response time. (Note: consider the overlap of computation and IO busts of different processes)</a:t>
+              <a:t>, draw the Gantt chart and calculate the average response time. (Note: consider the overlap of computation and IO bursts of different processes)</a:t>
             </a:r>
             <a:endParaRPr lang="en-SE" dirty="0"/>
           </a:p>
@@ -6620,8 +6404,8 @@
           </p:nvPr>
         </p:nvGraphicFramePr>
         <p:xfrm>
-          <a:off x="3920556" y="3276600"/>
-          <a:ext cx="4350887" cy="2377440"/>
+          <a:off x="3640843" y="3276600"/>
+          <a:ext cx="4630600" cy="2377440"/>
         </p:xfrm>
         <a:graphic>
           <a:graphicData uri="http://schemas.openxmlformats.org/drawingml/2006/table">
@@ -6630,7 +6414,7 @@
                 <a:tableStyleId>{5C22544A-7EE6-4342-B048-85BDC9FD1C3A}</a:tableStyleId>
               </a:tblPr>
               <a:tblGrid>
-                <a:gridCol w="320287">
+                <a:gridCol w="600000">
                   <a:extLst>
                     <a:ext uri="{9D8B030D-6E8A-4147-A177-3AD203B41FA5}">
                       <a16:colId xmlns:a16="http://schemas.microsoft.com/office/drawing/2014/main" val="3897766631"/>
@@ -7414,7 +7198,7 @@
                 <a:tableStyleId>{5C22544A-7EE6-4342-B048-85BDC9FD1C3A}</a:tableStyleId>
               </a:tblPr>
               <a:tblGrid>
-                <a:gridCol w="285577">
+                <a:gridCol w="560000">
                   <a:extLst>
                     <a:ext uri="{9D8B030D-6E8A-4147-A177-3AD203B41FA5}">
                       <a16:colId xmlns:a16="http://schemas.microsoft.com/office/drawing/2014/main" val="3897766631"/>
@@ -7428,21 +7212,21 @@
                     </a:ext>
                   </a:extLst>
                 </a:gridCol>
-                <a:gridCol w="955913">
+                <a:gridCol w="864438">
                   <a:extLst>
                     <a:ext uri="{9D8B030D-6E8A-4147-A177-3AD203B41FA5}">
                       <a16:colId xmlns:a16="http://schemas.microsoft.com/office/drawing/2014/main" val="3517187588"/>
                     </a:ext>
                   </a:extLst>
                 </a:gridCol>
-                <a:gridCol w="955913">
+                <a:gridCol w="864438">
                   <a:extLst>
                     <a:ext uri="{9D8B030D-6E8A-4147-A177-3AD203B41FA5}">
                       <a16:colId xmlns:a16="http://schemas.microsoft.com/office/drawing/2014/main" val="2248621"/>
                     </a:ext>
                   </a:extLst>
                 </a:gridCol>
-                <a:gridCol w="955913">
+                <a:gridCol w="864440">
                   <a:extLst>
                     <a:ext uri="{9D8B030D-6E8A-4147-A177-3AD203B41FA5}">
                       <a16:colId xmlns:a16="http://schemas.microsoft.com/office/drawing/2014/main" val="2712044097"/>
@@ -8992,8 +8776,8 @@
           <p:nvPr/>
         </p:nvGraphicFramePr>
         <p:xfrm>
-          <a:off x="3384508" y="2667000"/>
-          <a:ext cx="5422984" cy="2377440"/>
+          <a:off x="3104795" y="2667000"/>
+          <a:ext cx="5702697" cy="2377440"/>
         </p:xfrm>
         <a:graphic>
           <a:graphicData uri="http://schemas.openxmlformats.org/drawingml/2006/table">
@@ -9002,7 +8786,7 @@
                 <a:tableStyleId>{5C22544A-7EE6-4342-B048-85BDC9FD1C3A}</a:tableStyleId>
               </a:tblPr>
               <a:tblGrid>
-                <a:gridCol w="320287">
+                <a:gridCol w="600000">
                   <a:extLst>
                     <a:ext uri="{9D8B030D-6E8A-4147-A177-3AD203B41FA5}">
                       <a16:colId xmlns:a16="http://schemas.microsoft.com/office/drawing/2014/main" val="3897766631"/>
@@ -9824,7 +9608,7 @@
           <a:p>
             <a:r>
               <a:rPr lang="en-GB" dirty="0"/>
-              <a:t>Scheduling with Bursts ANS</a:t>
+              <a:t>Scheduling with Bursts II ANS</a:t>
             </a:r>
             <a:endParaRPr lang="en-SE" dirty="0"/>
           </a:p>
@@ -9851,8 +9635,8 @@
           </p:nvPr>
         </p:nvGraphicFramePr>
         <p:xfrm>
-          <a:off x="3200401" y="729069"/>
-          <a:ext cx="6934197" cy="2377440"/>
+          <a:off x="2893897" y="729069"/>
+          <a:ext cx="7240701" cy="2377440"/>
         </p:xfrm>
         <a:graphic>
           <a:graphicData uri="http://schemas.openxmlformats.org/drawingml/2006/table">
@@ -9861,7 +9645,7 @@
                 <a:tableStyleId>{5C22544A-7EE6-4342-B048-85BDC9FD1C3A}</a:tableStyleId>
               </a:tblPr>
               <a:tblGrid>
-                <a:gridCol w="293496">
+                <a:gridCol w="600000">
                   <a:extLst>
                     <a:ext uri="{9D8B030D-6E8A-4147-A177-3AD203B41FA5}">
                       <a16:colId xmlns:a16="http://schemas.microsoft.com/office/drawing/2014/main" val="3897766631"/>
@@ -12159,7 +11943,7 @@
           <a:p>
             <a:r>
               <a:rPr lang="en-GB" dirty="0"/>
-              <a:t>2) Compute the finish times and response times for all 5 processes, and the average response time. (If the division is hard, write a fraction like 28/5 instead of 5.6)</a:t>
+              <a:t>2) Compute the finish times and response times for all processes, and the average response time. (If the division is hard, write a fraction like 28/5 instead of 5.6)</a:t>
             </a:r>
           </a:p>
         </p:txBody>
@@ -12245,8 +12029,8 @@
           </p:nvPr>
         </p:nvGraphicFramePr>
         <p:xfrm>
-          <a:off x="850898" y="1240518"/>
-          <a:ext cx="10490204" cy="2651760"/>
+          <a:off x="571185" y="1240518"/>
+          <a:ext cx="10769917" cy="2651760"/>
         </p:xfrm>
         <a:graphic>
           <a:graphicData uri="http://schemas.openxmlformats.org/drawingml/2006/table">
@@ -12255,7 +12039,7 @@
                 <a:tableStyleId>{5C22544A-7EE6-4342-B048-85BDC9FD1C3A}</a:tableStyleId>
               </a:tblPr>
               <a:tblGrid>
-                <a:gridCol w="320287">
+                <a:gridCol w="600000">
                   <a:extLst>
                     <a:ext uri="{9D8B030D-6E8A-4147-A177-3AD203B41FA5}">
                       <a16:colId xmlns:a16="http://schemas.microsoft.com/office/drawing/2014/main" val="3897766631"/>
@@ -12290,42 +12074,42 @@
                     </a:ext>
                   </a:extLst>
                 </a:gridCol>
-                <a:gridCol w="1072097">
+                <a:gridCol w="922097">
                   <a:extLst>
                     <a:ext uri="{9D8B030D-6E8A-4147-A177-3AD203B41FA5}">
                       <a16:colId xmlns:a16="http://schemas.microsoft.com/office/drawing/2014/main" val="2248621"/>
                     </a:ext>
                   </a:extLst>
                 </a:gridCol>
-                <a:gridCol w="1072097">
+                <a:gridCol w="1222097">
                   <a:extLst>
                     <a:ext uri="{9D8B030D-6E8A-4147-A177-3AD203B41FA5}">
                       <a16:colId xmlns:a16="http://schemas.microsoft.com/office/drawing/2014/main" val="2712044097"/>
                     </a:ext>
                   </a:extLst>
                 </a:gridCol>
-                <a:gridCol w="1072097">
+                <a:gridCol w="922097">
                   <a:extLst>
                     <a:ext uri="{9D8B030D-6E8A-4147-A177-3AD203B41FA5}">
                       <a16:colId xmlns:a16="http://schemas.microsoft.com/office/drawing/2014/main" val="4072710305"/>
                     </a:ext>
                   </a:extLst>
                 </a:gridCol>
-                <a:gridCol w="1072097">
+                <a:gridCol w="1222097">
                   <a:extLst>
                     <a:ext uri="{9D8B030D-6E8A-4147-A177-3AD203B41FA5}">
                       <a16:colId xmlns:a16="http://schemas.microsoft.com/office/drawing/2014/main" val="3685768401"/>
                     </a:ext>
                   </a:extLst>
                 </a:gridCol>
-                <a:gridCol w="1072097">
+                <a:gridCol w="922097">
                   <a:extLst>
                     <a:ext uri="{9D8B030D-6E8A-4147-A177-3AD203B41FA5}">
                       <a16:colId xmlns:a16="http://schemas.microsoft.com/office/drawing/2014/main" val="3601507115"/>
                     </a:ext>
                   </a:extLst>
                 </a:gridCol>
-                <a:gridCol w="1072097">
+                <a:gridCol w="1222097">
                   <a:extLst>
                     <a:ext uri="{9D8B030D-6E8A-4147-A177-3AD203B41FA5}">
                       <a16:colId xmlns:a16="http://schemas.microsoft.com/office/drawing/2014/main" val="2233393087"/>
@@ -14662,8 +14446,8 @@
           </p:nvPr>
         </p:nvGraphicFramePr>
         <p:xfrm>
-          <a:off x="850898" y="1240518"/>
-          <a:ext cx="10490204" cy="2651760"/>
+          <a:off x="571185" y="1240518"/>
+          <a:ext cx="10769917" cy="2651760"/>
         </p:xfrm>
         <a:graphic>
           <a:graphicData uri="http://schemas.openxmlformats.org/drawingml/2006/table">
@@ -14672,7 +14456,7 @@
                 <a:tableStyleId>{5C22544A-7EE6-4342-B048-85BDC9FD1C3A}</a:tableStyleId>
               </a:tblPr>
               <a:tblGrid>
-                <a:gridCol w="320287">
+                <a:gridCol w="600000">
                   <a:extLst>
                     <a:ext uri="{9D8B030D-6E8A-4147-A177-3AD203B41FA5}">
                       <a16:colId xmlns:a16="http://schemas.microsoft.com/office/drawing/2014/main" val="3897766631"/>
@@ -14707,42 +14491,42 @@
                     </a:ext>
                   </a:extLst>
                 </a:gridCol>
-                <a:gridCol w="1072097">
+                <a:gridCol w="922097">
                   <a:extLst>
                     <a:ext uri="{9D8B030D-6E8A-4147-A177-3AD203B41FA5}">
                       <a16:colId xmlns:a16="http://schemas.microsoft.com/office/drawing/2014/main" val="2248621"/>
                     </a:ext>
                   </a:extLst>
                 </a:gridCol>
-                <a:gridCol w="1072097">
+                <a:gridCol w="1222097">
                   <a:extLst>
                     <a:ext uri="{9D8B030D-6E8A-4147-A177-3AD203B41FA5}">
                       <a16:colId xmlns:a16="http://schemas.microsoft.com/office/drawing/2014/main" val="2712044097"/>
                     </a:ext>
                   </a:extLst>
                 </a:gridCol>
-                <a:gridCol w="1072097">
+                <a:gridCol w="922097">
                   <a:extLst>
                     <a:ext uri="{9D8B030D-6E8A-4147-A177-3AD203B41FA5}">
                       <a16:colId xmlns:a16="http://schemas.microsoft.com/office/drawing/2014/main" val="4072710305"/>
                     </a:ext>
                   </a:extLst>
                 </a:gridCol>
-                <a:gridCol w="1072097">
+                <a:gridCol w="1222097">
                   <a:extLst>
                     <a:ext uri="{9D8B030D-6E8A-4147-A177-3AD203B41FA5}">
                       <a16:colId xmlns:a16="http://schemas.microsoft.com/office/drawing/2014/main" val="3685768401"/>
                     </a:ext>
                   </a:extLst>
                 </a:gridCol>
-                <a:gridCol w="1072097">
+                <a:gridCol w="922097">
                   <a:extLst>
                     <a:ext uri="{9D8B030D-6E8A-4147-A177-3AD203B41FA5}">
                       <a16:colId xmlns:a16="http://schemas.microsoft.com/office/drawing/2014/main" val="3601507115"/>
                     </a:ext>
                   </a:extLst>
                 </a:gridCol>
-                <a:gridCol w="1072097">
+                <a:gridCol w="1222097">
                   <a:extLst>
                     <a:ext uri="{9D8B030D-6E8A-4147-A177-3AD203B41FA5}">
                       <a16:colId xmlns:a16="http://schemas.microsoft.com/office/drawing/2014/main" val="2233393087"/>
@@ -17636,8 +17420,8 @@
           <p:nvPr/>
         </p:nvGraphicFramePr>
         <p:xfrm>
-          <a:off x="530799" y="889000"/>
-          <a:ext cx="10490204" cy="2743200"/>
+          <a:off x="251086" y="889000"/>
+          <a:ext cx="10769917" cy="2743200"/>
         </p:xfrm>
         <a:graphic>
           <a:graphicData uri="http://schemas.openxmlformats.org/drawingml/2006/table">
@@ -17646,7 +17430,7 @@
                 <a:tableStyleId>{5C22544A-7EE6-4342-B048-85BDC9FD1C3A}</a:tableStyleId>
               </a:tblPr>
               <a:tblGrid>
-                <a:gridCol w="320287">
+                <a:gridCol w="600000">
                   <a:extLst>
                     <a:ext uri="{9D8B030D-6E8A-4147-A177-3AD203B41FA5}">
                       <a16:colId xmlns:a16="http://schemas.microsoft.com/office/drawing/2014/main" val="3897766631"/>
@@ -17681,42 +17465,42 @@
                     </a:ext>
                   </a:extLst>
                 </a:gridCol>
-                <a:gridCol w="1072097">
+                <a:gridCol w="922097">
                   <a:extLst>
                     <a:ext uri="{9D8B030D-6E8A-4147-A177-3AD203B41FA5}">
                       <a16:colId xmlns:a16="http://schemas.microsoft.com/office/drawing/2014/main" val="2248621"/>
                     </a:ext>
                   </a:extLst>
                 </a:gridCol>
-                <a:gridCol w="1072097">
+                <a:gridCol w="1222097">
                   <a:extLst>
                     <a:ext uri="{9D8B030D-6E8A-4147-A177-3AD203B41FA5}">
                       <a16:colId xmlns:a16="http://schemas.microsoft.com/office/drawing/2014/main" val="2712044097"/>
                     </a:ext>
                   </a:extLst>
                 </a:gridCol>
-                <a:gridCol w="1072097">
+                <a:gridCol w="922097">
                   <a:extLst>
                     <a:ext uri="{9D8B030D-6E8A-4147-A177-3AD203B41FA5}">
                       <a16:colId xmlns:a16="http://schemas.microsoft.com/office/drawing/2014/main" val="4072710305"/>
                     </a:ext>
                   </a:extLst>
                 </a:gridCol>
-                <a:gridCol w="1072097">
+                <a:gridCol w="1222097">
                   <a:extLst>
                     <a:ext uri="{9D8B030D-6E8A-4147-A177-3AD203B41FA5}">
                       <a16:colId xmlns:a16="http://schemas.microsoft.com/office/drawing/2014/main" val="3685768401"/>
                     </a:ext>
                   </a:extLst>
                 </a:gridCol>
-                <a:gridCol w="1072097">
+                <a:gridCol w="922097">
                   <a:extLst>
                     <a:ext uri="{9D8B030D-6E8A-4147-A177-3AD203B41FA5}">
                       <a16:colId xmlns:a16="http://schemas.microsoft.com/office/drawing/2014/main" val="3601507115"/>
                     </a:ext>
                   </a:extLst>
                 </a:gridCol>
-                <a:gridCol w="1072097">
+                <a:gridCol w="1222097">
                   <a:extLst>
                     <a:ext uri="{9D8B030D-6E8A-4147-A177-3AD203B41FA5}">
                       <a16:colId xmlns:a16="http://schemas.microsoft.com/office/drawing/2014/main" val="2233393087"/>
@@ -20372,8 +20156,8 @@
           </p:nvPr>
         </p:nvGraphicFramePr>
         <p:xfrm>
-          <a:off x="990600" y="854105"/>
-          <a:ext cx="10490204" cy="3017520"/>
+          <a:off x="710887" y="854105"/>
+          <a:ext cx="10769917" cy="3017520"/>
         </p:xfrm>
         <a:graphic>
           <a:graphicData uri="http://schemas.openxmlformats.org/drawingml/2006/table">
@@ -20382,7 +20166,7 @@
                 <a:tableStyleId>{5C22544A-7EE6-4342-B048-85BDC9FD1C3A}</a:tableStyleId>
               </a:tblPr>
               <a:tblGrid>
-                <a:gridCol w="320287">
+                <a:gridCol w="600000">
                   <a:extLst>
                     <a:ext uri="{9D8B030D-6E8A-4147-A177-3AD203B41FA5}">
                       <a16:colId xmlns:a16="http://schemas.microsoft.com/office/drawing/2014/main" val="3897766631"/>
@@ -20417,42 +20201,42 @@
                     </a:ext>
                   </a:extLst>
                 </a:gridCol>
-                <a:gridCol w="1072097">
+                <a:gridCol w="922097">
                   <a:extLst>
                     <a:ext uri="{9D8B030D-6E8A-4147-A177-3AD203B41FA5}">
                       <a16:colId xmlns:a16="http://schemas.microsoft.com/office/drawing/2014/main" val="2248621"/>
                     </a:ext>
                   </a:extLst>
                 </a:gridCol>
-                <a:gridCol w="1072097">
+                <a:gridCol w="1222097">
                   <a:extLst>
                     <a:ext uri="{9D8B030D-6E8A-4147-A177-3AD203B41FA5}">
                       <a16:colId xmlns:a16="http://schemas.microsoft.com/office/drawing/2014/main" val="2712044097"/>
                     </a:ext>
                   </a:extLst>
                 </a:gridCol>
-                <a:gridCol w="1072097">
+                <a:gridCol w="922097">
                   <a:extLst>
                     <a:ext uri="{9D8B030D-6E8A-4147-A177-3AD203B41FA5}">
                       <a16:colId xmlns:a16="http://schemas.microsoft.com/office/drawing/2014/main" val="4072710305"/>
                     </a:ext>
                   </a:extLst>
                 </a:gridCol>
-                <a:gridCol w="1072097">
+                <a:gridCol w="1222097">
                   <a:extLst>
                     <a:ext uri="{9D8B030D-6E8A-4147-A177-3AD203B41FA5}">
                       <a16:colId xmlns:a16="http://schemas.microsoft.com/office/drawing/2014/main" val="3685768401"/>
                     </a:ext>
                   </a:extLst>
                 </a:gridCol>
-                <a:gridCol w="1072097">
+                <a:gridCol w="922097">
                   <a:extLst>
                     <a:ext uri="{9D8B030D-6E8A-4147-A177-3AD203B41FA5}">
                       <a16:colId xmlns:a16="http://schemas.microsoft.com/office/drawing/2014/main" val="3601507115"/>
                     </a:ext>
                   </a:extLst>
                 </a:gridCol>
-                <a:gridCol w="1072097">
+                <a:gridCol w="1222097">
                   <a:extLst>
                     <a:ext uri="{9D8B030D-6E8A-4147-A177-3AD203B41FA5}">
                       <a16:colId xmlns:a16="http://schemas.microsoft.com/office/drawing/2014/main" val="2233393087"/>
@@ -23832,7 +23616,7 @@
           <a:p>
             <a:r>
               <a:rPr lang="en-US" dirty="0"/>
-              <a:t>Scheduling II ANS</a:t>
+              <a:t>Scheduling II ANS (RR Explanation)</a:t>
             </a:r>
             <a:endParaRPr lang="en-SE" dirty="0"/>
           </a:p>

--- a/PPTs/L5-Exercises ANS.pptx
+++ b/PPTs/L5-Exercises ANS.pptx
@@ -347,14 +347,14 @@
           <a:effectLst/>
           <a:extLst>
             <a:ext uri="{909E8E84-426E-40dd-AFC4-6F175D3DCCD1}">
-              <a14:hiddenFill xmlns:a14="http://schemas.microsoft.com/office/drawing/2010/main" xmlns="">
+              <a14:hiddenFill xmlns="" xmlns:a14="http://schemas.microsoft.com/office/drawing/2010/main">
                 <a:solidFill>
                   <a:schemeClr val="bg1"/>
                 </a:solidFill>
               </a14:hiddenFill>
             </a:ext>
             <a:ext uri="{91240B29-F687-4f45-9708-019B960494DF}">
-              <a14:hiddenLine xmlns:a14="http://schemas.microsoft.com/office/drawing/2010/main" xmlns="" w="12700">
+              <a14:hiddenLine xmlns="" xmlns:a14="http://schemas.microsoft.com/office/drawing/2010/main" w="12700">
                 <a:pattFill prst="narHorz">
                   <a:fgClr>
                     <a:schemeClr val="tx1"/>
@@ -369,7 +369,7 @@
               </a14:hiddenLine>
             </a:ext>
             <a:ext uri="{AF507438-7753-43e0-B8FC-AC1667EBCBE1}">
-              <a14:hiddenEffects xmlns:a14="http://schemas.microsoft.com/office/drawing/2010/main" xmlns="">
+              <a14:hiddenEffects xmlns="" xmlns:a14="http://schemas.microsoft.com/office/drawing/2010/main">
                 <a:effectLst>
                   <a:outerShdw dist="35921" dir="2700000" algn="ctr" rotWithShape="0">
                     <a:schemeClr val="bg2"/>
@@ -475,14 +475,14 @@
           <a:effectLst/>
           <a:extLst>
             <a:ext uri="{909E8E84-426E-40dd-AFC4-6F175D3DCCD1}">
-              <a14:hiddenFill xmlns:a14="http://schemas.microsoft.com/office/drawing/2010/main" xmlns="">
+              <a14:hiddenFill xmlns="" xmlns:a14="http://schemas.microsoft.com/office/drawing/2010/main">
                 <a:solidFill>
                   <a:schemeClr val="bg1"/>
                 </a:solidFill>
               </a14:hiddenFill>
             </a:ext>
             <a:ext uri="{91240B29-F687-4f45-9708-019B960494DF}">
-              <a14:hiddenLine xmlns:a14="http://schemas.microsoft.com/office/drawing/2010/main" xmlns="" w="12700">
+              <a14:hiddenLine xmlns="" xmlns:a14="http://schemas.microsoft.com/office/drawing/2010/main" w="12700">
                 <a:pattFill prst="narHorz">
                   <a:fgClr>
                     <a:schemeClr val="tx1"/>
@@ -497,7 +497,7 @@
               </a14:hiddenLine>
             </a:ext>
             <a:ext uri="{AF507438-7753-43e0-B8FC-AC1667EBCBE1}">
-              <a14:hiddenEffects xmlns:a14="http://schemas.microsoft.com/office/drawing/2010/main" xmlns="">
+              <a14:hiddenEffects xmlns="" xmlns:a14="http://schemas.microsoft.com/office/drawing/2010/main">
                 <a:effectLst>
                   <a:outerShdw dist="35921" dir="2700000" algn="ctr" rotWithShape="0">
                     <a:schemeClr val="bg2"/>
@@ -565,17 +565,17 @@
           <a:effectLst/>
           <a:extLst>
             <a:ext uri="{FAA26D3D-D897-4be2-8F04-BA451C77F1D7}">
-              <ma14:placeholderFlag xmlns:ma14="http://schemas.microsoft.com/office/mac/drawingml/2011/main" xmlns="" val="1"/>
+              <ma14:placeholderFlag xmlns="" xmlns:ma14="http://schemas.microsoft.com/office/mac/drawingml/2011/main" val="1"/>
             </a:ext>
             <a:ext uri="{909E8E84-426E-40dd-AFC4-6F175D3DCCD1}">
-              <a14:hiddenFill xmlns:a14="http://schemas.microsoft.com/office/drawing/2010/main" xmlns="">
+              <a14:hiddenFill xmlns="" xmlns:a14="http://schemas.microsoft.com/office/drawing/2010/main">
                 <a:solidFill>
                   <a:srgbClr val="FFFFFF"/>
                 </a:solidFill>
               </a14:hiddenFill>
             </a:ext>
             <a:ext uri="{AF507438-7753-43e0-B8FC-AC1667EBCBE1}">
-              <a14:hiddenEffects xmlns:a14="http://schemas.microsoft.com/office/drawing/2010/main" xmlns="">
+              <a14:hiddenEffects xmlns="" xmlns:a14="http://schemas.microsoft.com/office/drawing/2010/main">
                 <a:effectLst>
                   <a:outerShdw blurRad="63500" dist="38099" dir="2700000" algn="ctr" rotWithShape="0">
                     <a:srgbClr val="000000">
@@ -586,7 +586,7 @@
               </a14:hiddenEffects>
             </a:ext>
             <a:ext uri="{53640926-AAD7-44d8-BBD7-CCE9431645EC}">
-              <a14:shadowObscured xmlns:a14="http://schemas.microsoft.com/office/drawing/2010/main" xmlns="" val="1"/>
+              <a14:shadowObscured xmlns="" xmlns:a14="http://schemas.microsoft.com/office/drawing/2010/main" val="1"/>
             </a:ext>
           </a:extLst>
         </p:spPr>
@@ -616,14 +616,14 @@
           <a:effectLst/>
           <a:extLst>
             <a:ext uri="{909E8E84-426E-40dd-AFC4-6F175D3DCCD1}">
-              <a14:hiddenFill xmlns:a14="http://schemas.microsoft.com/office/drawing/2010/main" xmlns="">
+              <a14:hiddenFill xmlns="" xmlns:a14="http://schemas.microsoft.com/office/drawing/2010/main">
                 <a:solidFill>
                   <a:schemeClr val="bg1"/>
                 </a:solidFill>
               </a14:hiddenFill>
             </a:ext>
             <a:ext uri="{91240B29-F687-4f45-9708-019B960494DF}">
-              <a14:hiddenLine xmlns:a14="http://schemas.microsoft.com/office/drawing/2010/main" xmlns="" w="12700">
+              <a14:hiddenLine xmlns="" xmlns:a14="http://schemas.microsoft.com/office/drawing/2010/main" w="12700">
                 <a:pattFill prst="narHorz">
                   <a:fgClr>
                     <a:schemeClr val="tx1"/>
@@ -638,7 +638,7 @@
               </a14:hiddenLine>
             </a:ext>
             <a:ext uri="{AF507438-7753-43e0-B8FC-AC1667EBCBE1}">
-              <a14:hiddenEffects xmlns:a14="http://schemas.microsoft.com/office/drawing/2010/main" xmlns="">
+              <a14:hiddenEffects xmlns="" xmlns:a14="http://schemas.microsoft.com/office/drawing/2010/main">
                 <a:effectLst>
                   <a:outerShdw dist="35921" dir="2700000" algn="ctr" rotWithShape="0">
                     <a:schemeClr val="bg2"/>
@@ -888,10 +888,10 @@
         <p:spPr>
           <a:extLst>
             <a:ext uri="{FAA26D3D-D897-4be2-8F04-BA451C77F1D7}">
-              <ma14:placeholderFlag xmlns:ma14="http://schemas.microsoft.com/office/mac/drawingml/2011/main" xmlns="" val="1"/>
+              <ma14:placeholderFlag xmlns="" xmlns:ma14="http://schemas.microsoft.com/office/mac/drawingml/2011/main" val="1"/>
             </a:ext>
             <a:ext uri="{AF507438-7753-43e0-B8FC-AC1667EBCBE1}">
-              <a14:hiddenEffects xmlns:a14="http://schemas.microsoft.com/office/drawing/2010/main" xmlns="">
+              <a14:hiddenEffects xmlns="" xmlns:a14="http://schemas.microsoft.com/office/drawing/2010/main">
                 <a:effectLst>
                   <a:outerShdw blurRad="63500" dist="38099" dir="2700000" algn="ctr" rotWithShape="0">
                     <a:schemeClr val="bg2">
@@ -968,7 +968,9 @@
         <p:txBody>
           <a:bodyPr/>
           <a:lstStyle/>
-          <a:p/>
+          <a:p>
+            <a:endParaRPr/>
+          </a:p>
         </p:txBody>
       </p:sp>
     </p:spTree>
@@ -1045,7 +1047,9 @@
         <p:txBody>
           <a:bodyPr/>
           <a:lstStyle/>
-          <a:p/>
+          <a:p>
+            <a:endParaRPr/>
+          </a:p>
         </p:txBody>
       </p:sp>
     </p:spTree>
@@ -1122,7 +1126,9 @@
         <p:txBody>
           <a:bodyPr/>
           <a:lstStyle/>
-          <a:p/>
+          <a:p>
+            <a:endParaRPr/>
+          </a:p>
         </p:txBody>
       </p:sp>
     </p:spTree>
@@ -1199,7 +1205,9 @@
         <p:txBody>
           <a:bodyPr/>
           <a:lstStyle/>
-          <a:p/>
+          <a:p>
+            <a:endParaRPr/>
+          </a:p>
         </p:txBody>
       </p:sp>
     </p:spTree>
@@ -1276,7 +1284,9 @@
         <p:txBody>
           <a:bodyPr/>
           <a:lstStyle/>
-          <a:p/>
+          <a:p>
+            <a:endParaRPr/>
+          </a:p>
         </p:txBody>
       </p:sp>
     </p:spTree>
@@ -1353,7 +1363,9 @@
         <p:txBody>
           <a:bodyPr/>
           <a:lstStyle/>
-          <a:p/>
+          <a:p>
+            <a:endParaRPr/>
+          </a:p>
         </p:txBody>
       </p:sp>
     </p:spTree>
@@ -3325,17 +3337,17 @@
           <a:effectLst/>
           <a:extLst>
             <a:ext uri="{FAA26D3D-D897-4be2-8F04-BA451C77F1D7}">
-              <ma14:placeholderFlag xmlns:ma14="http://schemas.microsoft.com/office/mac/drawingml/2011/main" xmlns="" val="1"/>
+              <ma14:placeholderFlag xmlns="" xmlns:ma14="http://schemas.microsoft.com/office/mac/drawingml/2011/main" val="1"/>
             </a:ext>
             <a:ext uri="{909E8E84-426E-40dd-AFC4-6F175D3DCCD1}">
-              <a14:hiddenFill xmlns:a14="http://schemas.microsoft.com/office/drawing/2010/main" xmlns="">
+              <a14:hiddenFill xmlns="" xmlns:a14="http://schemas.microsoft.com/office/drawing/2010/main">
                 <a:solidFill>
                   <a:schemeClr val="bg1"/>
                 </a:solidFill>
               </a14:hiddenFill>
             </a:ext>
             <a:ext uri="{91240B29-F687-4f45-9708-019B960494DF}">
-              <a14:hiddenLine xmlns:a14="http://schemas.microsoft.com/office/drawing/2010/main" xmlns="" w="12700">
+              <a14:hiddenLine xmlns="" xmlns:a14="http://schemas.microsoft.com/office/drawing/2010/main" w="12700">
                 <a:pattFill prst="narHorz">
                   <a:fgClr>
                     <a:schemeClr val="tx1"/>
@@ -3350,7 +3362,7 @@
               </a14:hiddenLine>
             </a:ext>
             <a:ext uri="{AF507438-7753-43e0-B8FC-AC1667EBCBE1}">
-              <a14:hiddenEffects xmlns:a14="http://schemas.microsoft.com/office/drawing/2010/main" xmlns="">
+              <a14:hiddenEffects xmlns="" xmlns:a14="http://schemas.microsoft.com/office/drawing/2010/main">
                 <a:effectLst>
                   <a:outerShdw blurRad="63500" dist="38099" dir="2700000" algn="ctr" rotWithShape="0">
                     <a:schemeClr val="bg2">
@@ -3403,17 +3415,17 @@
           <a:effectLst/>
           <a:extLst>
             <a:ext uri="{FAA26D3D-D897-4be2-8F04-BA451C77F1D7}">
-              <ma14:placeholderFlag xmlns:ma14="http://schemas.microsoft.com/office/mac/drawingml/2011/main" xmlns="" val="1"/>
+              <ma14:placeholderFlag xmlns="" xmlns:ma14="http://schemas.microsoft.com/office/mac/drawingml/2011/main" val="1"/>
             </a:ext>
             <a:ext uri="{909E8E84-426E-40dd-AFC4-6F175D3DCCD1}">
-              <a14:hiddenFill xmlns:a14="http://schemas.microsoft.com/office/drawing/2010/main" xmlns="">
+              <a14:hiddenFill xmlns="" xmlns:a14="http://schemas.microsoft.com/office/drawing/2010/main">
                 <a:solidFill>
                   <a:schemeClr val="bg1"/>
                 </a:solidFill>
               </a14:hiddenFill>
             </a:ext>
             <a:ext uri="{91240B29-F687-4f45-9708-019B960494DF}">
-              <a14:hiddenLine xmlns:a14="http://schemas.microsoft.com/office/drawing/2010/main" xmlns="" w="12700">
+              <a14:hiddenLine xmlns="" xmlns:a14="http://schemas.microsoft.com/office/drawing/2010/main" w="12700">
                 <a:pattFill prst="narHorz">
                   <a:fgClr>
                     <a:schemeClr val="tx1"/>
@@ -3428,7 +3440,7 @@
               </a14:hiddenLine>
             </a:ext>
             <a:ext uri="{AF507438-7753-43e0-B8FC-AC1667EBCBE1}">
-              <a14:hiddenEffects xmlns:a14="http://schemas.microsoft.com/office/drawing/2010/main" xmlns="">
+              <a14:hiddenEffects xmlns="" xmlns:a14="http://schemas.microsoft.com/office/drawing/2010/main">
                 <a:effectLst>
                   <a:outerShdw blurRad="63500" dist="38099" dir="2700000" algn="ctr" rotWithShape="0">
                     <a:schemeClr val="bg2">
@@ -3507,14 +3519,14 @@
           <a:effectLst/>
           <a:extLst>
             <a:ext uri="{909E8E84-426E-40dd-AFC4-6F175D3DCCD1}">
-              <a14:hiddenFill xmlns:a14="http://schemas.microsoft.com/office/drawing/2010/main" xmlns="">
+              <a14:hiddenFill xmlns="" xmlns:a14="http://schemas.microsoft.com/office/drawing/2010/main">
                 <a:solidFill>
                   <a:schemeClr val="bg1"/>
                 </a:solidFill>
               </a14:hiddenFill>
             </a:ext>
             <a:ext uri="{91240B29-F687-4f45-9708-019B960494DF}">
-              <a14:hiddenLine xmlns:a14="http://schemas.microsoft.com/office/drawing/2010/main" xmlns="" w="12700">
+              <a14:hiddenLine xmlns="" xmlns:a14="http://schemas.microsoft.com/office/drawing/2010/main" w="12700">
                 <a:pattFill prst="narHorz">
                   <a:fgClr>
                     <a:schemeClr val="tx1"/>
@@ -3529,7 +3541,7 @@
               </a14:hiddenLine>
             </a:ext>
             <a:ext uri="{AF507438-7753-43e0-B8FC-AC1667EBCBE1}">
-              <a14:hiddenEffects xmlns:a14="http://schemas.microsoft.com/office/drawing/2010/main" xmlns="">
+              <a14:hiddenEffects xmlns="" xmlns:a14="http://schemas.microsoft.com/office/drawing/2010/main">
                 <a:effectLst>
                   <a:outerShdw dist="35921" dir="2700000" algn="ctr" rotWithShape="0">
                     <a:schemeClr val="bg2"/>
@@ -3595,12 +3607,12 @@
           <a:effectLst/>
           <a:extLst>
             <a:ext uri="{909E8E84-426E-40dd-AFC4-6F175D3DCCD1}">
-              <a14:hiddenFill xmlns:a14="http://schemas.microsoft.com/office/drawing/2010/main" xmlns="">
+              <a14:hiddenFill xmlns="" xmlns:a14="http://schemas.microsoft.com/office/drawing/2010/main">
                 <a:noFill/>
               </a14:hiddenFill>
             </a:ext>
             <a:ext uri="{AF507438-7753-43e0-B8FC-AC1667EBCBE1}">
-              <a14:hiddenEffects xmlns:a14="http://schemas.microsoft.com/office/drawing/2010/main" xmlns="">
+              <a14:hiddenEffects xmlns="" xmlns:a14="http://schemas.microsoft.com/office/drawing/2010/main">
                 <a:effectLst>
                   <a:outerShdw blurRad="63500" dist="38099" dir="2700000" algn="ctr" rotWithShape="0">
                     <a:schemeClr val="bg2">
@@ -5993,7 +6005,7 @@
           </a:ln>
           <a:extLst>
             <a:ext uri="{AF507438-7753-43e0-B8FC-AC1667EBCBE1}">
-              <a14:hiddenEffects xmlns="" xmlns:a14="http://schemas.microsoft.com/office/drawing/2010/main">
+              <a14:hiddenEffects xmlns:a14="http://schemas.microsoft.com/office/drawing/2010/main" xmlns="">
                 <a:effectLst>
                   <a:outerShdw dist="35921" dir="2700000" algn="ctr" rotWithShape="0">
                     <a:schemeClr val="bg2"/>
@@ -6101,7 +6113,7 @@
           </a:ln>
           <a:extLst>
             <a:ext uri="{AF507438-7753-43e0-B8FC-AC1667EBCBE1}">
-              <a14:hiddenEffects xmlns="" xmlns:a14="http://schemas.microsoft.com/office/drawing/2010/main">
+              <a14:hiddenEffects xmlns:a14="http://schemas.microsoft.com/office/drawing/2010/main" xmlns="">
                 <a:effectLst>
                   <a:outerShdw dist="35921" dir="2700000" algn="ctr" rotWithShape="0">
                     <a:schemeClr val="bg2"/>
@@ -6211,7 +6223,7 @@
           </a:ln>
           <a:extLst>
             <a:ext uri="{AF507438-7753-43e0-B8FC-AC1667EBCBE1}">
-              <a14:hiddenEffects xmlns="" xmlns:a14="http://schemas.microsoft.com/office/drawing/2010/main">
+              <a14:hiddenEffects xmlns:a14="http://schemas.microsoft.com/office/drawing/2010/main" xmlns="">
                 <a:effectLst>
                   <a:outerShdw dist="35921" dir="2700000" algn="ctr" rotWithShape="0">
                     <a:schemeClr val="bg2"/>
@@ -8484,7 +8496,7 @@
           </a:ln>
           <a:extLst>
             <a:ext uri="{AF507438-7753-43e0-B8FC-AC1667EBCBE1}">
-              <a14:hiddenEffects xmlns="" xmlns:a14="http://schemas.microsoft.com/office/drawing/2010/main">
+              <a14:hiddenEffects xmlns:a14="http://schemas.microsoft.com/office/drawing/2010/main" xmlns="">
                 <a:effectLst>
                   <a:outerShdw dist="35921" dir="2700000" algn="ctr" rotWithShape="0">
                     <a:schemeClr val="bg2"/>
@@ -10870,7 +10882,7 @@
           </a:ln>
           <a:extLst>
             <a:ext uri="{AF507438-7753-43e0-B8FC-AC1667EBCBE1}">
-              <a14:hiddenEffects xmlns="" xmlns:a14="http://schemas.microsoft.com/office/drawing/2010/main">
+              <a14:hiddenEffects xmlns:a14="http://schemas.microsoft.com/office/drawing/2010/main" xmlns="">
                 <a:effectLst>
                   <a:outerShdw dist="35921" dir="2700000" algn="ctr" rotWithShape="0">
                     <a:schemeClr val="bg2"/>
@@ -10978,7 +10990,7 @@
           </a:ln>
           <a:extLst>
             <a:ext uri="{AF507438-7753-43e0-B8FC-AC1667EBCBE1}">
-              <a14:hiddenEffects xmlns="" xmlns:a14="http://schemas.microsoft.com/office/drawing/2010/main">
+              <a14:hiddenEffects xmlns:a14="http://schemas.microsoft.com/office/drawing/2010/main" xmlns="">
                 <a:effectLst>
                   <a:outerShdw dist="35921" dir="2700000" algn="ctr" rotWithShape="0">
                     <a:schemeClr val="bg2"/>
@@ -11086,7 +11098,7 @@
           </a:ln>
           <a:extLst>
             <a:ext uri="{AF507438-7753-43e0-B8FC-AC1667EBCBE1}">
-              <a14:hiddenEffects xmlns="" xmlns:a14="http://schemas.microsoft.com/office/drawing/2010/main">
+              <a14:hiddenEffects xmlns:a14="http://schemas.microsoft.com/office/drawing/2010/main" xmlns="">
                 <a:effectLst>
                   <a:outerShdw dist="35921" dir="2700000" algn="ctr" rotWithShape="0">
                     <a:schemeClr val="bg2"/>
@@ -11545,299 +11557,445 @@
           </a:p>
         </p:txBody>
       </p:sp>
-      <p:sp>
-        <p:nvSpPr>
-          <p:cNvPr id="3" name="Content Placeholder 2">
-            <a:extLst>
-              <a:ext uri="{FF2B5EF4-FFF2-40B4-BE49-F238E27FC236}">
-                <a16:creationId xmlns:a16="http://schemas.microsoft.com/office/drawing/2014/main" id="{C96E4FFE-F627-F544-AB84-D0B202D11C76}"/>
-              </a:ext>
-            </a:extLst>
-          </p:cNvPr>
-          <p:cNvSpPr>
-            <a:spLocks noGrp="1"/>
-          </p:cNvSpPr>
-          <p:nvPr>
-            <p:ph idx="1"/>
-          </p:nvPr>
-        </p:nvSpPr>
-        <p:spPr/>
-        <p:txBody>
-          <a:bodyPr>
-            <a:normAutofit/>
-          </a:bodyPr>
-          <a:lstStyle/>
-          <a:p>
-            <a:r>
-              <a:rPr lang="en-US" altLang="ko-KR" dirty="0"/>
-              <a:t>Use </a:t>
-            </a:r>
-            <a:r>
-              <a:rPr lang="en-US" altLang="ko-KR" sz="2800" dirty="0"/>
-              <a:t>exponential averaging  </a:t>
-            </a:r>
-            <a:r>
-              <a:rPr lang="en-US" altLang="ko-KR" sz="2800" dirty="0">
-                <a:sym typeface="Symbol" panose="05050102010706020507" pitchFamily="18" charset="2"/>
-              </a:rPr>
-              <a:t></a:t>
-            </a:r>
-            <a:r>
-              <a:rPr lang="en-US" altLang="ko-KR" sz="2800" baseline="-25000" dirty="0">
-                <a:sym typeface="Symbol" panose="05050102010706020507" pitchFamily="18" charset="2"/>
-              </a:rPr>
-              <a:t>n</a:t>
-            </a:r>
-            <a:r>
-              <a:rPr lang="en-US" altLang="ko-KR" sz="2800" dirty="0">
-                <a:sym typeface="Symbol" panose="05050102010706020507" pitchFamily="18" charset="2"/>
-              </a:rPr>
-              <a:t> = t</a:t>
-            </a:r>
-            <a:r>
-              <a:rPr lang="en-US" altLang="ko-KR" sz="2800" baseline="-25000" dirty="0">
-                <a:sym typeface="Symbol" panose="05050102010706020507" pitchFamily="18" charset="2"/>
-              </a:rPr>
-              <a:t>n-1</a:t>
-            </a:r>
-            <a:r>
-              <a:rPr lang="en-US" altLang="ko-KR" sz="2800" dirty="0">
-                <a:sym typeface="Symbol" panose="05050102010706020507" pitchFamily="18" charset="2"/>
-              </a:rPr>
-              <a:t>+(1-)</a:t>
-            </a:r>
-            <a:r>
-              <a:rPr lang="en-US" altLang="ko-KR" sz="2800" baseline="-25000" dirty="0">
-                <a:sym typeface="Symbol" panose="05050102010706020507" pitchFamily="18" charset="2"/>
-              </a:rPr>
-              <a:t>n-1</a:t>
-            </a:r>
-            <a:r>
-              <a:rPr lang="en-US" altLang="ko-KR" sz="2800" dirty="0">
-                <a:sym typeface="Symbol" panose="05050102010706020507" pitchFamily="18" charset="2"/>
-              </a:rPr>
-              <a:t> to predict the next burst time. Assume initial estimate </a:t>
-            </a:r>
-            <a:r>
-              <a:rPr lang="en-US" altLang="ko-KR" sz="2800" baseline="-25000" dirty="0">
-                <a:sym typeface="Symbol" panose="05050102010706020507" pitchFamily="18" charset="2"/>
-              </a:rPr>
-              <a:t>0</a:t>
-            </a:r>
-            <a:r>
-              <a:rPr lang="en-US" altLang="ko-KR" sz="2800" dirty="0">
-                <a:sym typeface="Symbol" panose="05050102010706020507" pitchFamily="18" charset="2"/>
-              </a:rPr>
-              <a:t> = 10, and the </a:t>
-            </a:r>
-            <a:r>
-              <a:rPr lang="en-GB" dirty="0"/>
-              <a:t>actual burst times of the first four processes </a:t>
-            </a:r>
-            <a:r>
-              <a:rPr lang="en-US" altLang="ko-KR" sz="2800" dirty="0">
-                <a:sym typeface="Symbol" panose="05050102010706020507" pitchFamily="18" charset="2"/>
-              </a:rPr>
-              <a:t>t</a:t>
-            </a:r>
-            <a:r>
-              <a:rPr lang="en-US" altLang="ko-KR" sz="2800" baseline="-25000" dirty="0">
-                <a:sym typeface="Symbol" panose="05050102010706020507" pitchFamily="18" charset="2"/>
-              </a:rPr>
-              <a:t>0</a:t>
-            </a:r>
-            <a:r>
-              <a:rPr lang="en-GB" dirty="0"/>
-              <a:t>, </a:t>
-            </a:r>
-            <a:r>
-              <a:rPr lang="en-US" altLang="ko-KR" sz="2800" dirty="0">
-                <a:sym typeface="Symbol" panose="05050102010706020507" pitchFamily="18" charset="2"/>
-              </a:rPr>
-              <a:t>t</a:t>
-            </a:r>
-            <a:r>
-              <a:rPr lang="en-US" altLang="ko-KR" sz="2800" baseline="-25000" dirty="0">
-                <a:sym typeface="Symbol" panose="05050102010706020507" pitchFamily="18" charset="2"/>
-              </a:rPr>
-              <a:t>1</a:t>
-            </a:r>
-            <a:r>
-              <a:rPr lang="en-GB" dirty="0"/>
-              <a:t>, </a:t>
-            </a:r>
-            <a:r>
-              <a:rPr lang="en-US" altLang="ko-KR" sz="2800" dirty="0">
-                <a:sym typeface="Symbol" panose="05050102010706020507" pitchFamily="18" charset="2"/>
-              </a:rPr>
-              <a:t>t</a:t>
-            </a:r>
-            <a:r>
-              <a:rPr lang="en-US" altLang="ko-KR" sz="2800" baseline="-25000" dirty="0">
-                <a:sym typeface="Symbol" panose="05050102010706020507" pitchFamily="18" charset="2"/>
-              </a:rPr>
-              <a:t>2</a:t>
-            </a:r>
-            <a:r>
-              <a:rPr lang="en-GB" dirty="0"/>
-              <a:t>, </a:t>
-            </a:r>
-            <a:r>
-              <a:rPr lang="en-US" altLang="ko-KR" sz="2800" dirty="0">
-                <a:sym typeface="Symbol" panose="05050102010706020507" pitchFamily="18" charset="2"/>
-              </a:rPr>
-              <a:t>t</a:t>
-            </a:r>
-            <a:r>
-              <a:rPr lang="en-US" altLang="ko-KR" sz="2800" baseline="-25000" dirty="0">
-                <a:sym typeface="Symbol" panose="05050102010706020507" pitchFamily="18" charset="2"/>
-              </a:rPr>
-              <a:t>3</a:t>
-            </a:r>
-            <a:r>
-              <a:rPr lang="en-GB" dirty="0"/>
-              <a:t> are 4, 8, 6 and 7, respectively. Given α = 0.5. Compute the predicted burst times </a:t>
-            </a:r>
-            <a:r>
-              <a:rPr lang="en-US" altLang="ko-KR" sz="2800" dirty="0">
-                <a:sym typeface="Symbol" panose="05050102010706020507" pitchFamily="18" charset="2"/>
-              </a:rPr>
-              <a:t></a:t>
-            </a:r>
-            <a:r>
-              <a:rPr lang="en-US" altLang="ko-KR" sz="2800" baseline="-25000" dirty="0">
-                <a:sym typeface="Symbol" panose="05050102010706020507" pitchFamily="18" charset="2"/>
-              </a:rPr>
-              <a:t>1</a:t>
-            </a:r>
-            <a:r>
-              <a:rPr lang="en-US" altLang="ko-KR" sz="2800" dirty="0">
-                <a:sym typeface="Symbol" panose="05050102010706020507" pitchFamily="18" charset="2"/>
-              </a:rPr>
-              <a:t>, </a:t>
-            </a:r>
-            <a:r>
-              <a:rPr lang="en-US" altLang="ko-KR" sz="2800" baseline="-25000" dirty="0">
-                <a:sym typeface="Symbol" panose="05050102010706020507" pitchFamily="18" charset="2"/>
-              </a:rPr>
-              <a:t>2</a:t>
-            </a:r>
-            <a:r>
-              <a:rPr lang="en-US" altLang="ko-KR" sz="2800" dirty="0">
-                <a:sym typeface="Symbol" panose="05050102010706020507" pitchFamily="18" charset="2"/>
-              </a:rPr>
-              <a:t>, </a:t>
-            </a:r>
-            <a:r>
-              <a:rPr lang="en-US" altLang="ko-KR" sz="2800" baseline="-25000" dirty="0">
-                <a:sym typeface="Symbol" panose="05050102010706020507" pitchFamily="18" charset="2"/>
-              </a:rPr>
-              <a:t>3</a:t>
-            </a:r>
-            <a:r>
-              <a:rPr lang="en-US" altLang="ko-KR" sz="2800" dirty="0">
-                <a:sym typeface="Symbol" panose="05050102010706020507" pitchFamily="18" charset="2"/>
-              </a:rPr>
-              <a:t>, </a:t>
-            </a:r>
-            <a:r>
-              <a:rPr lang="en-US" altLang="ko-KR" sz="2800" baseline="-25000" dirty="0">
-                <a:sym typeface="Symbol" panose="05050102010706020507" pitchFamily="18" charset="2"/>
-              </a:rPr>
-              <a:t>4. </a:t>
-            </a:r>
-            <a:r>
-              <a:rPr lang="en-US" altLang="ko-KR" sz="2800" dirty="0">
-                <a:sym typeface="Symbol" panose="05050102010706020507" pitchFamily="18" charset="2"/>
-              </a:rPr>
-              <a:t>(It is best if you can bring a calculator. But if you do not have one, just writing out the following formulas is OK.)</a:t>
-            </a:r>
-            <a:endParaRPr lang="en-US" altLang="ko-KR" sz="2800" baseline="-25000" dirty="0">
-              <a:sym typeface="Symbol" panose="05050102010706020507" pitchFamily="18" charset="2"/>
-            </a:endParaRPr>
-          </a:p>
-          <a:p>
-            <a:pPr marL="0" indent="0">
-              <a:buNone/>
-            </a:pPr>
-            <a:endParaRPr lang="en-US" altLang="ko-KR" sz="2800" baseline="-25000" dirty="0">
-              <a:sym typeface="Symbol" panose="05050102010706020507" pitchFamily="18" charset="2"/>
-            </a:endParaRPr>
-          </a:p>
-          <a:p>
-            <a:r>
-              <a:rPr lang="en-US" altLang="ko-KR" sz="2800" dirty="0">
-                <a:sym typeface="Symbol" panose="05050102010706020507" pitchFamily="18" charset="2"/>
-              </a:rPr>
-              <a:t></a:t>
-            </a:r>
-            <a:r>
-              <a:rPr lang="en-US" altLang="ko-KR" sz="2800" baseline="-25000" dirty="0">
-                <a:sym typeface="Symbol" panose="05050102010706020507" pitchFamily="18" charset="2"/>
-              </a:rPr>
-              <a:t>1  </a:t>
-            </a:r>
-            <a:r>
-              <a:rPr lang="en-GB" dirty="0"/>
-              <a:t>= 0.5 x 4 + 0.5 x 10 = 7</a:t>
-            </a:r>
-          </a:p>
-          <a:p>
-            <a:r>
-              <a:rPr lang="en-US" altLang="ko-KR" sz="2800" dirty="0">
-                <a:sym typeface="Symbol" panose="05050102010706020507" pitchFamily="18" charset="2"/>
-              </a:rPr>
-              <a:t></a:t>
-            </a:r>
-            <a:r>
-              <a:rPr lang="en-US" altLang="ko-KR" sz="2800" baseline="-25000" dirty="0">
-                <a:sym typeface="Symbol" panose="05050102010706020507" pitchFamily="18" charset="2"/>
-              </a:rPr>
-              <a:t>2  </a:t>
-            </a:r>
-            <a:r>
-              <a:rPr lang="en-GB" dirty="0"/>
-              <a:t>= 0.5 x 8 + 0.5 x 7 = 7.5</a:t>
-            </a:r>
-          </a:p>
-          <a:p>
-            <a:r>
-              <a:rPr lang="en-US" altLang="ko-KR" sz="2800" dirty="0">
-                <a:sym typeface="Symbol" panose="05050102010706020507" pitchFamily="18" charset="2"/>
-              </a:rPr>
-              <a:t></a:t>
-            </a:r>
-            <a:r>
-              <a:rPr lang="en-US" altLang="ko-KR" sz="2800" baseline="-25000" dirty="0">
-                <a:sym typeface="Symbol" panose="05050102010706020507" pitchFamily="18" charset="2"/>
-              </a:rPr>
-              <a:t>3  </a:t>
-            </a:r>
-            <a:r>
-              <a:rPr lang="en-GB" dirty="0"/>
-              <a:t>= 0.5 x 6 + 0.5 x 7.5 = 6.75</a:t>
-            </a:r>
-          </a:p>
-          <a:p>
-            <a:r>
-              <a:rPr lang="en-US" altLang="ko-KR" sz="2800" dirty="0">
-                <a:sym typeface="Symbol" panose="05050102010706020507" pitchFamily="18" charset="2"/>
-              </a:rPr>
-              <a:t></a:t>
-            </a:r>
-            <a:r>
-              <a:rPr lang="en-US" altLang="ko-KR" sz="2800" baseline="-25000" dirty="0">
-                <a:sym typeface="Symbol" panose="05050102010706020507" pitchFamily="18" charset="2"/>
-              </a:rPr>
-              <a:t>4  </a:t>
-            </a:r>
-            <a:r>
-              <a:rPr lang="en-GB" dirty="0"/>
-              <a:t>= 0.5 x 7 + 0.5 x 6.75 = 6.875</a:t>
-            </a:r>
-          </a:p>
-        </p:txBody>
-      </p:sp>
+      <mc:AlternateContent xmlns:mc="http://schemas.openxmlformats.org/markup-compatibility/2006">
+        <mc:Choice xmlns:a14="http://schemas.microsoft.com/office/drawing/2010/main" Requires="a14">
+          <p:sp>
+            <p:nvSpPr>
+              <p:cNvPr id="3" name="Content Placeholder 2">
+                <a:extLst>
+                  <a:ext uri="{FF2B5EF4-FFF2-40B4-BE49-F238E27FC236}">
+                    <a16:creationId xmlns:a16="http://schemas.microsoft.com/office/drawing/2014/main" id="{C96E4FFE-F627-F544-AB84-D0B202D11C76}"/>
+                  </a:ext>
+                </a:extLst>
+              </p:cNvPr>
+              <p:cNvSpPr>
+                <a:spLocks noGrp="1"/>
+              </p:cNvSpPr>
+              <p:nvPr>
+                <p:ph idx="1"/>
+              </p:nvPr>
+            </p:nvSpPr>
+            <p:spPr/>
+            <p:txBody>
+              <a:bodyPr>
+                <a:normAutofit/>
+              </a:bodyPr>
+              <a:lstStyle/>
+              <a:p>
+                <a:r>
+                  <a:rPr lang="en-US" altLang="ko-KR" dirty="0"/>
+                  <a:t>Use </a:t>
+                </a:r>
+                <a:r>
+                  <a:rPr lang="en-US" altLang="ko-KR" sz="2800" dirty="0"/>
+                  <a:t>exponential averaging </a:t>
+                </a:r>
+                <a14:m>
+                  <m:oMath xmlns:m="http://schemas.openxmlformats.org/officeDocument/2006/math">
+                    <m:sSub>
+                      <m:sSubPr>
+                        <m:ctrlPr>
+                          <a:rPr lang="ar-AE" i="1" smtClean="0">
+                            <a:latin typeface="Cambria Math" panose="02040503050406030204" pitchFamily="18" charset="0"/>
+                          </a:rPr>
+                        </m:ctrlPr>
+                      </m:sSubPr>
+                      <m:e>
+                        <m:sSub>
+                          <m:sSubPr>
+                            <m:ctrlPr>
+                              <a:rPr lang="en-US" i="1">
+                                <a:latin typeface="Cambria Math" panose="02040503050406030204" pitchFamily="18" charset="0"/>
+                              </a:rPr>
+                            </m:ctrlPr>
+                          </m:sSubPr>
+                          <m:e>
+                            <m:r>
+                              <a:rPr lang="en-US" i="1">
+                                <a:latin typeface="Cambria Math" panose="02040503050406030204" pitchFamily="18" charset="0"/>
+                              </a:rPr>
+                              <m:t>𝑡</m:t>
+                            </m:r>
+                          </m:e>
+                          <m:sub>
+                            <m:r>
+                              <a:rPr lang="ar-AE" i="1">
+                                <a:latin typeface="Cambria Math" panose="02040503050406030204" pitchFamily="18" charset="0"/>
+                              </a:rPr>
+                              <m:t>𝑛</m:t>
+                            </m:r>
+                          </m:sub>
+                        </m:sSub>
+                        <m:r>
+                          <a:rPr lang="en-US" i="1">
+                            <a:latin typeface="Cambria Math" panose="02040503050406030204" pitchFamily="18" charset="0"/>
+                          </a:rPr>
+                          <m:t>=</m:t>
+                        </m:r>
+                        <m:r>
+                          <a:rPr lang="en-US" i="1">
+                            <a:latin typeface="Cambria Math" panose="02040503050406030204" pitchFamily="18" charset="0"/>
+                          </a:rPr>
+                          <m:t>𝛼</m:t>
+                        </m:r>
+                        <m:sSub>
+                          <m:sSubPr>
+                            <m:ctrlPr>
+                              <a:rPr lang="ar-AE" i="1">
+                                <a:latin typeface="Cambria Math" panose="02040503050406030204" pitchFamily="18" charset="0"/>
+                              </a:rPr>
+                            </m:ctrlPr>
+                          </m:sSubPr>
+                          <m:e>
+                            <m:r>
+                              <a:rPr lang="ar-AE" i="1">
+                                <a:latin typeface="Cambria Math" panose="02040503050406030204" pitchFamily="18" charset="0"/>
+                              </a:rPr>
+                              <m:t>𝑥</m:t>
+                            </m:r>
+                          </m:e>
+                          <m:sub>
+                            <m:r>
+                              <a:rPr lang="ar-AE" i="1">
+                                <a:latin typeface="Cambria Math" panose="02040503050406030204" pitchFamily="18" charset="0"/>
+                              </a:rPr>
+                              <m:t>𝑛</m:t>
+                            </m:r>
+                          </m:sub>
+                        </m:sSub>
+                        <m:r>
+                          <a:rPr lang="en-US" i="1">
+                            <a:latin typeface="Cambria Math" panose="02040503050406030204" pitchFamily="18" charset="0"/>
+                          </a:rPr>
+                          <m:t>+(</m:t>
+                        </m:r>
+                        <m:r>
+                          <a:rPr lang="en-US" i="1">
+                            <a:latin typeface="Cambria Math" panose="02040503050406030204" pitchFamily="18" charset="0"/>
+                          </a:rPr>
+                          <m:t>1</m:t>
+                        </m:r>
+                        <m:r>
+                          <a:rPr lang="en-US" i="1">
+                            <a:latin typeface="Cambria Math" panose="02040503050406030204" pitchFamily="18" charset="0"/>
+                          </a:rPr>
+                          <m:t>−</m:t>
+                        </m:r>
+                        <m:r>
+                          <a:rPr lang="en-US" i="1">
+                            <a:latin typeface="Cambria Math" panose="02040503050406030204" pitchFamily="18" charset="0"/>
+                          </a:rPr>
+                          <m:t>𝛼</m:t>
+                        </m:r>
+                        <m:r>
+                          <a:rPr lang="en-US" i="1">
+                            <a:latin typeface="Cambria Math" panose="02040503050406030204" pitchFamily="18" charset="0"/>
+                          </a:rPr>
+                          <m:t>)</m:t>
+                        </m:r>
+                        <m:r>
+                          <a:rPr lang="en-US" i="1">
+                            <a:latin typeface="Cambria Math" panose="02040503050406030204" pitchFamily="18" charset="0"/>
+                          </a:rPr>
+                          <m:t>𝑡</m:t>
+                        </m:r>
+                      </m:e>
+                      <m:sub>
+                        <m:r>
+                          <a:rPr lang="ar-AE" i="1">
+                            <a:latin typeface="Cambria Math" panose="02040503050406030204" pitchFamily="18" charset="0"/>
+                          </a:rPr>
+                          <m:t>𝑛</m:t>
+                        </m:r>
+                        <m:r>
+                          <a:rPr lang="ar-AE">
+                            <a:latin typeface="Cambria Math" panose="02040503050406030204" pitchFamily="18" charset="0"/>
+                          </a:rPr>
+                          <m:t>−</m:t>
+                        </m:r>
+                        <m:r>
+                          <a:rPr lang="ar-AE">
+                            <a:latin typeface="Cambria Math" panose="02040503050406030204" pitchFamily="18" charset="0"/>
+                          </a:rPr>
+                          <m:t>1</m:t>
+                        </m:r>
+                      </m:sub>
+                    </m:sSub>
+                  </m:oMath>
+                </a14:m>
+                <a:r>
+                  <a:rPr lang="en-US" altLang="ko-KR" sz="2800" dirty="0">
+                    <a:sym typeface="Symbol" panose="05050102010706020507" pitchFamily="18" charset="2"/>
+                  </a:rPr>
+                  <a:t> to predict the next burst time. Assume initial estimate </a:t>
+                </a:r>
+                <a:r>
+                  <a:rPr lang="en-US" altLang="ko-KR" dirty="0">
+                    <a:sym typeface="Symbol" panose="05050102010706020507" pitchFamily="18" charset="2"/>
+                  </a:rPr>
+                  <a:t>t</a:t>
+                </a:r>
+                <a:r>
+                  <a:rPr lang="en-US" altLang="ko-KR" sz="2800" baseline="-25000" dirty="0">
+                    <a:sym typeface="Symbol" panose="05050102010706020507" pitchFamily="18" charset="2"/>
+                  </a:rPr>
+                  <a:t>0</a:t>
+                </a:r>
+                <a:r>
+                  <a:rPr lang="en-US" altLang="ko-KR" sz="2800" dirty="0">
+                    <a:sym typeface="Symbol" panose="05050102010706020507" pitchFamily="18" charset="2"/>
+                  </a:rPr>
+                  <a:t> = 10, and the </a:t>
+                </a:r>
+                <a:r>
+                  <a:rPr lang="en-GB" dirty="0"/>
+                  <a:t>actual burst times of the first four processes </a:t>
+                </a:r>
+                <a:r>
+                  <a:rPr lang="en-US" altLang="ko-KR" sz="2800" dirty="0">
+                    <a:sym typeface="Symbol" panose="05050102010706020507" pitchFamily="18" charset="2"/>
+                  </a:rPr>
+                  <a:t>x</a:t>
+                </a:r>
+                <a:r>
+                  <a:rPr lang="en-US" altLang="ko-KR" sz="2800" baseline="-25000" dirty="0">
+                    <a:sym typeface="Symbol" panose="05050102010706020507" pitchFamily="18" charset="2"/>
+                  </a:rPr>
+                  <a:t>1</a:t>
+                </a:r>
+                <a:r>
+                  <a:rPr lang="en-GB" dirty="0"/>
+                  <a:t>, </a:t>
+                </a:r>
+                <a:r>
+                  <a:rPr lang="en-US" altLang="ko-KR" sz="2800" dirty="0">
+                    <a:sym typeface="Symbol" panose="05050102010706020507" pitchFamily="18" charset="2"/>
+                  </a:rPr>
+                  <a:t>x</a:t>
+                </a:r>
+                <a:r>
+                  <a:rPr lang="en-US" altLang="ko-KR" sz="2800" baseline="-25000" dirty="0">
+                    <a:sym typeface="Symbol" panose="05050102010706020507" pitchFamily="18" charset="2"/>
+                  </a:rPr>
+                  <a:t>2</a:t>
+                </a:r>
+                <a:r>
+                  <a:rPr lang="en-GB" dirty="0"/>
+                  <a:t>, </a:t>
+                </a:r>
+                <a:r>
+                  <a:rPr lang="en-US" altLang="ko-KR" sz="2800" dirty="0">
+                    <a:sym typeface="Symbol" panose="05050102010706020507" pitchFamily="18" charset="2"/>
+                  </a:rPr>
+                  <a:t>x</a:t>
+                </a:r>
+                <a:r>
+                  <a:rPr lang="en-US" altLang="ko-KR" sz="2800" baseline="-25000" dirty="0">
+                    <a:sym typeface="Symbol" panose="05050102010706020507" pitchFamily="18" charset="2"/>
+                  </a:rPr>
+                  <a:t>3</a:t>
+                </a:r>
+                <a:r>
+                  <a:rPr lang="en-GB" dirty="0"/>
+                  <a:t>, </a:t>
+                </a:r>
+                <a:r>
+                  <a:rPr lang="en-US" altLang="ko-KR" sz="2800" dirty="0">
+                    <a:sym typeface="Symbol" panose="05050102010706020507" pitchFamily="18" charset="2"/>
+                  </a:rPr>
+                  <a:t>x</a:t>
+                </a:r>
+                <a:r>
+                  <a:rPr lang="en-US" altLang="ko-KR" sz="2800" baseline="-25000" dirty="0">
+                    <a:sym typeface="Symbol" panose="05050102010706020507" pitchFamily="18" charset="2"/>
+                  </a:rPr>
+                  <a:t>4</a:t>
+                </a:r>
+                <a:r>
+                  <a:rPr lang="en-GB" dirty="0"/>
+                  <a:t> are 4, 8, 6 and 7, respectively. Given α = 0.5. Compute the predicted burst times </a:t>
+                </a:r>
+                <a:r>
+                  <a:rPr lang="en-US" altLang="ko-KR" sz="2800" dirty="0">
+                    <a:sym typeface="Symbol" panose="05050102010706020507" pitchFamily="18" charset="2"/>
+                  </a:rPr>
+                  <a:t>t</a:t>
+                </a:r>
+                <a:r>
+                  <a:rPr lang="en-US" altLang="ko-KR" sz="2800" baseline="-25000" dirty="0">
+                    <a:sym typeface="Symbol" panose="05050102010706020507" pitchFamily="18" charset="2"/>
+                  </a:rPr>
+                  <a:t>1</a:t>
+                </a:r>
+                <a:r>
+                  <a:rPr lang="en-US" altLang="ko-KR" sz="2800" dirty="0">
+                    <a:sym typeface="Symbol" panose="05050102010706020507" pitchFamily="18" charset="2"/>
+                  </a:rPr>
+                  <a:t>, t</a:t>
+                </a:r>
+                <a:r>
+                  <a:rPr lang="en-US" altLang="ko-KR" sz="2800" baseline="-25000" dirty="0">
+                    <a:sym typeface="Symbol" panose="05050102010706020507" pitchFamily="18" charset="2"/>
+                  </a:rPr>
+                  <a:t>2</a:t>
+                </a:r>
+                <a:r>
+                  <a:rPr lang="en-US" altLang="ko-KR" sz="2800" dirty="0">
+                    <a:sym typeface="Symbol" panose="05050102010706020507" pitchFamily="18" charset="2"/>
+                  </a:rPr>
+                  <a:t>, t</a:t>
+                </a:r>
+                <a:r>
+                  <a:rPr lang="en-US" altLang="ko-KR" sz="2800" baseline="-25000" dirty="0">
+                    <a:sym typeface="Symbol" panose="05050102010706020507" pitchFamily="18" charset="2"/>
+                  </a:rPr>
+                  <a:t>3</a:t>
+                </a:r>
+                <a:r>
+                  <a:rPr lang="en-US" altLang="ko-KR" sz="2800" dirty="0">
+                    <a:sym typeface="Symbol" panose="05050102010706020507" pitchFamily="18" charset="2"/>
+                  </a:rPr>
+                  <a:t>, t</a:t>
+                </a:r>
+                <a:r>
+                  <a:rPr lang="en-US" altLang="ko-KR" sz="2800" baseline="-25000" dirty="0">
+                    <a:sym typeface="Symbol" panose="05050102010706020507" pitchFamily="18" charset="2"/>
+                  </a:rPr>
+                  <a:t>4. </a:t>
+                </a:r>
+                <a:r>
+                  <a:rPr lang="en-US" altLang="ko-KR" sz="2800" dirty="0">
+                    <a:sym typeface="Symbol" panose="05050102010706020507" pitchFamily="18" charset="2"/>
+                  </a:rPr>
+                  <a:t>(It is best if you can bring a calculator. But if you do not have one, just writing out the following formulas is OK.)</a:t>
+                </a:r>
+                <a:endParaRPr lang="en-US" altLang="ko-KR" sz="2800" baseline="-25000" dirty="0">
+                  <a:sym typeface="Symbol" panose="05050102010706020507" pitchFamily="18" charset="2"/>
+                </a:endParaRPr>
+              </a:p>
+              <a:p>
+                <a:pPr marL="0" indent="0">
+                  <a:buNone/>
+                </a:pPr>
+                <a:endParaRPr lang="en-US" altLang="ko-KR" sz="2800" baseline="-25000" dirty="0">
+                  <a:sym typeface="Symbol" panose="05050102010706020507" pitchFamily="18" charset="2"/>
+                </a:endParaRPr>
+              </a:p>
+              <a:p>
+                <a:r>
+                  <a:rPr lang="en-US" altLang="ko-KR" sz="2800" dirty="0">
+                    <a:sym typeface="Symbol" panose="05050102010706020507" pitchFamily="18" charset="2"/>
+                  </a:rPr>
+                  <a:t></a:t>
+                </a:r>
+                <a:r>
+                  <a:rPr lang="en-US" altLang="ko-KR" sz="2800" baseline="-25000" dirty="0">
+                    <a:sym typeface="Symbol" panose="05050102010706020507" pitchFamily="18" charset="2"/>
+                  </a:rPr>
+                  <a:t>1  </a:t>
+                </a:r>
+                <a:r>
+                  <a:rPr lang="en-GB" dirty="0"/>
+                  <a:t>= 0.5 x 4 + 0.5 x 10 = 7</a:t>
+                </a:r>
+              </a:p>
+              <a:p>
+                <a:r>
+                  <a:rPr lang="en-US" altLang="ko-KR" sz="2800" dirty="0">
+                    <a:sym typeface="Symbol" panose="05050102010706020507" pitchFamily="18" charset="2"/>
+                  </a:rPr>
+                  <a:t></a:t>
+                </a:r>
+                <a:r>
+                  <a:rPr lang="en-US" altLang="ko-KR" sz="2800" baseline="-25000" dirty="0">
+                    <a:sym typeface="Symbol" panose="05050102010706020507" pitchFamily="18" charset="2"/>
+                  </a:rPr>
+                  <a:t>2  </a:t>
+                </a:r>
+                <a:r>
+                  <a:rPr lang="en-GB" dirty="0"/>
+                  <a:t>= 0.5 x 8 + 0.5 x 7 = 7.5</a:t>
+                </a:r>
+              </a:p>
+              <a:p>
+                <a:r>
+                  <a:rPr lang="en-US" altLang="ko-KR" sz="2800" dirty="0">
+                    <a:sym typeface="Symbol" panose="05050102010706020507" pitchFamily="18" charset="2"/>
+                  </a:rPr>
+                  <a:t></a:t>
+                </a:r>
+                <a:r>
+                  <a:rPr lang="en-US" altLang="ko-KR" sz="2800" baseline="-25000" dirty="0">
+                    <a:sym typeface="Symbol" panose="05050102010706020507" pitchFamily="18" charset="2"/>
+                  </a:rPr>
+                  <a:t>3  </a:t>
+                </a:r>
+                <a:r>
+                  <a:rPr lang="en-GB" dirty="0"/>
+                  <a:t>= 0.5 x 6 + 0.5 x 7.5 = 6.75</a:t>
+                </a:r>
+              </a:p>
+              <a:p>
+                <a:r>
+                  <a:rPr lang="en-US" altLang="ko-KR" sz="2800" dirty="0">
+                    <a:sym typeface="Symbol" panose="05050102010706020507" pitchFamily="18" charset="2"/>
+                  </a:rPr>
+                  <a:t></a:t>
+                </a:r>
+                <a:r>
+                  <a:rPr lang="en-US" altLang="ko-KR" sz="2800" baseline="-25000" dirty="0">
+                    <a:sym typeface="Symbol" panose="05050102010706020507" pitchFamily="18" charset="2"/>
+                  </a:rPr>
+                  <a:t>4  </a:t>
+                </a:r>
+                <a:r>
+                  <a:rPr lang="en-GB" dirty="0"/>
+                  <a:t>= 0.5 x 7 + 0.5 x 6.75 = 6.875</a:t>
+                </a:r>
+              </a:p>
+            </p:txBody>
+          </p:sp>
+        </mc:Choice>
+        <mc:Fallback>
+          <p:sp>
+            <p:nvSpPr>
+              <p:cNvPr id="3" name="Content Placeholder 2">
+                <a:extLst>
+                  <a:ext uri="{FF2B5EF4-FFF2-40B4-BE49-F238E27FC236}">
+                    <a16:creationId xmlns:a16="http://schemas.microsoft.com/office/drawing/2014/main" id="{C96E4FFE-F627-F544-AB84-D0B202D11C76}"/>
+                  </a:ext>
+                </a:extLst>
+              </p:cNvPr>
+              <p:cNvSpPr>
+                <a:spLocks noGrp="1" noRot="1" noChangeAspect="1" noMove="1" noResize="1" noEditPoints="1" noAdjustHandles="1" noChangeArrowheads="1" noChangeShapeType="1" noTextEdit="1"/>
+              </p:cNvSpPr>
+              <p:nvPr>
+                <p:ph idx="1"/>
+              </p:nvPr>
+            </p:nvSpPr>
+            <p:spPr>
+              <a:blipFill>
+                <a:blip r:embed="rId2"/>
+                <a:stretch>
+                  <a:fillRect l="-1211" t="-2148"/>
+                </a:stretch>
+              </a:blipFill>
+            </p:spPr>
+            <p:txBody>
+              <a:bodyPr/>
+              <a:lstStyle/>
+              <a:p>
+                <a:r>
+                  <a:rPr lang="en-US">
+                    <a:noFill/>
+                  </a:rPr>
+                  <a:t> </a:t>
+                </a:r>
+              </a:p>
+            </p:txBody>
+          </p:sp>
+        </mc:Fallback>
+      </mc:AlternateContent>
     </p:spTree>
     <p:extLst>
       <p:ext uri="{BB962C8B-B14F-4D97-AF65-F5344CB8AC3E}">
@@ -17048,7 +17206,7 @@
           </a:ln>
           <a:extLst>
             <a:ext uri="{AF507438-7753-43e0-B8FC-AC1667EBCBE1}">
-              <a14:hiddenEffects xmlns="" xmlns:a14="http://schemas.microsoft.com/office/drawing/2010/main">
+              <a14:hiddenEffects xmlns:a14="http://schemas.microsoft.com/office/drawing/2010/main" xmlns="">
                 <a:effectLst>
                   <a:outerShdw dist="35921" dir="2700000" algn="ctr" rotWithShape="0">
                     <a:schemeClr val="bg2"/>
@@ -17156,7 +17314,7 @@
           </a:ln>
           <a:extLst>
             <a:ext uri="{AF507438-7753-43e0-B8FC-AC1667EBCBE1}">
-              <a14:hiddenEffects xmlns="" xmlns:a14="http://schemas.microsoft.com/office/drawing/2010/main">
+              <a14:hiddenEffects xmlns:a14="http://schemas.microsoft.com/office/drawing/2010/main" xmlns="">
                 <a:effectLst>
                   <a:outerShdw dist="35921" dir="2700000" algn="ctr" rotWithShape="0">
                     <a:schemeClr val="bg2"/>
@@ -17264,7 +17422,7 @@
           </a:ln>
           <a:extLst>
             <a:ext uri="{AF507438-7753-43e0-B8FC-AC1667EBCBE1}">
-              <a14:hiddenEffects xmlns="" xmlns:a14="http://schemas.microsoft.com/office/drawing/2010/main">
+              <a14:hiddenEffects xmlns:a14="http://schemas.microsoft.com/office/drawing/2010/main" xmlns="">
                 <a:effectLst>
                   <a:outerShdw dist="35921" dir="2700000" algn="ctr" rotWithShape="0">
                     <a:schemeClr val="bg2"/>
@@ -17336,6 +17494,78 @@
               </a:solidFill>
               <a:latin typeface="Gill Sans Light"/>
             </a:endParaRPr>
+          </a:p>
+        </p:txBody>
+      </p:sp>
+      <p:sp>
+        <p:nvSpPr>
+          <p:cNvPr id="14" name="TextBox 13">
+            <a:extLst>
+              <a:ext uri="{FF2B5EF4-FFF2-40B4-BE49-F238E27FC236}">
+                <a16:creationId xmlns:a16="http://schemas.microsoft.com/office/drawing/2014/main" id="{FEDE3442-36C1-4E98-AF74-D9E2BF7CDBAE}"/>
+              </a:ext>
+            </a:extLst>
+          </p:cNvPr>
+          <p:cNvSpPr txBox="1"/>
+          <p:nvPr/>
+        </p:nvSpPr>
+        <p:spPr>
+          <a:xfrm>
+            <a:off x="67238" y="4487892"/>
+            <a:ext cx="3089683" cy="584775"/>
+          </a:xfrm>
+          <a:prstGeom prst="rect">
+            <a:avLst/>
+          </a:prstGeom>
+          <a:noFill/>
+        </p:spPr>
+        <p:txBody>
+          <a:bodyPr wrap="square">
+            <a:spAutoFit/>
+          </a:bodyPr>
+          <a:lstStyle/>
+          <a:p>
+            <a:r>
+              <a:rPr lang="en-GB" sz="1600" b="0" dirty="0">
+                <a:solidFill>
+                  <a:srgbClr val="FF0000"/>
+                </a:solidFill>
+              </a:rPr>
+              <a:t>Response time </a:t>
+            </a:r>
+            <a:r>
+              <a:rPr lang="en-US" sz="1600" b="0" dirty="0">
+                <a:solidFill>
+                  <a:srgbClr val="FF0000"/>
+                </a:solidFill>
+              </a:rPr>
+              <a:t>= </a:t>
+            </a:r>
+            <a:r>
+              <a:rPr lang="en-GB" sz="1600" b="0" dirty="0" err="1">
+                <a:solidFill>
+                  <a:srgbClr val="FF0000"/>
+                </a:solidFill>
+              </a:rPr>
+              <a:t>FinishTime</a:t>
+            </a:r>
+            <a:r>
+              <a:rPr lang="en-GB" sz="1600" b="0" dirty="0">
+                <a:solidFill>
+                  <a:srgbClr val="FF0000"/>
+                </a:solidFill>
+              </a:rPr>
+              <a:t> – </a:t>
+            </a:r>
+            <a:r>
+              <a:rPr lang="en-GB" sz="1600" b="0" dirty="0" err="1">
+                <a:solidFill>
+                  <a:srgbClr val="FF0000"/>
+                </a:solidFill>
+              </a:rPr>
+              <a:t>ArrivalTime</a:t>
+            </a:r>
+            <a:endParaRPr lang="en-US" sz="1600" b="0" dirty="0"/>
           </a:p>
         </p:txBody>
       </p:sp>
@@ -23157,7 +23387,7 @@
           </a:ln>
           <a:extLst>
             <a:ext uri="{AF507438-7753-43e0-B8FC-AC1667EBCBE1}">
-              <a14:hiddenEffects xmlns="" xmlns:a14="http://schemas.microsoft.com/office/drawing/2010/main">
+              <a14:hiddenEffects xmlns:a14="http://schemas.microsoft.com/office/drawing/2010/main" xmlns="">
                 <a:effectLst>
                   <a:outerShdw dist="35921" dir="2700000" algn="ctr" rotWithShape="0">
                     <a:schemeClr val="bg2"/>
@@ -23265,7 +23495,7 @@
           </a:ln>
           <a:extLst>
             <a:ext uri="{AF507438-7753-43e0-B8FC-AC1667EBCBE1}">
-              <a14:hiddenEffects xmlns="" xmlns:a14="http://schemas.microsoft.com/office/drawing/2010/main">
+              <a14:hiddenEffects xmlns:a14="http://schemas.microsoft.com/office/drawing/2010/main" xmlns="">
                 <a:effectLst>
                   <a:outerShdw dist="35921" dir="2700000" algn="ctr" rotWithShape="0">
                     <a:schemeClr val="bg2"/>
@@ -23373,7 +23603,7 @@
           </a:ln>
           <a:extLst>
             <a:ext uri="{AF507438-7753-43e0-B8FC-AC1667EBCBE1}">
-              <a14:hiddenEffects xmlns="" xmlns:a14="http://schemas.microsoft.com/office/drawing/2010/main">
+              <a14:hiddenEffects xmlns:a14="http://schemas.microsoft.com/office/drawing/2010/main" xmlns="">
                 <a:effectLst>
                   <a:outerShdw dist="35921" dir="2700000" algn="ctr" rotWithShape="0">
                     <a:schemeClr val="bg2"/>
@@ -23481,7 +23711,7 @@
           </a:ln>
           <a:extLst>
             <a:ext uri="{AF507438-7753-43e0-B8FC-AC1667EBCBE1}">
-              <a14:hiddenEffects xmlns="" xmlns:a14="http://schemas.microsoft.com/office/drawing/2010/main">
+              <a14:hiddenEffects xmlns:a14="http://schemas.microsoft.com/office/drawing/2010/main" xmlns="">
                 <a:effectLst>
                   <a:outerShdw dist="35921" dir="2700000" algn="ctr" rotWithShape="0">
                     <a:schemeClr val="bg2"/>
@@ -23553,6 +23783,78 @@
               </a:solidFill>
               <a:latin typeface="Gill Sans Light"/>
             </a:endParaRPr>
+          </a:p>
+        </p:txBody>
+      </p:sp>
+      <p:sp>
+        <p:nvSpPr>
+          <p:cNvPr id="15" name="TextBox 14">
+            <a:extLst>
+              <a:ext uri="{FF2B5EF4-FFF2-40B4-BE49-F238E27FC236}">
+                <a16:creationId xmlns:a16="http://schemas.microsoft.com/office/drawing/2014/main" id="{8E8FEEAA-B810-4E10-BD0D-E427AA1D60BD}"/>
+              </a:ext>
+            </a:extLst>
+          </p:cNvPr>
+          <p:cNvSpPr txBox="1"/>
+          <p:nvPr/>
+        </p:nvSpPr>
+        <p:spPr>
+          <a:xfrm>
+            <a:off x="67238" y="4487892"/>
+            <a:ext cx="3089683" cy="584775"/>
+          </a:xfrm>
+          <a:prstGeom prst="rect">
+            <a:avLst/>
+          </a:prstGeom>
+          <a:noFill/>
+        </p:spPr>
+        <p:txBody>
+          <a:bodyPr wrap="square">
+            <a:spAutoFit/>
+          </a:bodyPr>
+          <a:lstStyle/>
+          <a:p>
+            <a:r>
+              <a:rPr lang="en-GB" sz="1600" b="0" dirty="0">
+                <a:solidFill>
+                  <a:srgbClr val="FF0000"/>
+                </a:solidFill>
+              </a:rPr>
+              <a:t>Response time </a:t>
+            </a:r>
+            <a:r>
+              <a:rPr lang="en-US" sz="1600" b="0" dirty="0">
+                <a:solidFill>
+                  <a:srgbClr val="FF0000"/>
+                </a:solidFill>
+              </a:rPr>
+              <a:t>= </a:t>
+            </a:r>
+            <a:r>
+              <a:rPr lang="en-GB" sz="1600" b="0" dirty="0" err="1">
+                <a:solidFill>
+                  <a:srgbClr val="FF0000"/>
+                </a:solidFill>
+              </a:rPr>
+              <a:t>FinishTime</a:t>
+            </a:r>
+            <a:r>
+              <a:rPr lang="en-GB" sz="1600" b="0" dirty="0">
+                <a:solidFill>
+                  <a:srgbClr val="FF0000"/>
+                </a:solidFill>
+              </a:rPr>
+              <a:t> – </a:t>
+            </a:r>
+            <a:r>
+              <a:rPr lang="en-GB" sz="1600" b="0" dirty="0" err="1">
+                <a:solidFill>
+                  <a:srgbClr val="FF0000"/>
+                </a:solidFill>
+              </a:rPr>
+              <a:t>ArrivalTime</a:t>
+            </a:r>
+            <a:endParaRPr lang="en-US" sz="1600" b="0" dirty="0"/>
           </a:p>
         </p:txBody>
       </p:sp>
@@ -24975,7 +25277,7 @@
           </a:ln>
           <a:extLst>
             <a:ext uri="{AF507438-7753-43e0-B8FC-AC1667EBCBE1}">
-              <a14:hiddenEffects xmlns="" xmlns:a14="http://schemas.microsoft.com/office/drawing/2010/main">
+              <a14:hiddenEffects xmlns:a14="http://schemas.microsoft.com/office/drawing/2010/main" xmlns="">
                 <a:effectLst>
                   <a:outerShdw dist="35921" dir="2700000" algn="ctr" rotWithShape="0">
                     <a:schemeClr val="bg2"/>
@@ -25083,7 +25385,7 @@
           </a:ln>
           <a:extLst>
             <a:ext uri="{AF507438-7753-43e0-B8FC-AC1667EBCBE1}">
-              <a14:hiddenEffects xmlns="" xmlns:a14="http://schemas.microsoft.com/office/drawing/2010/main">
+              <a14:hiddenEffects xmlns:a14="http://schemas.microsoft.com/office/drawing/2010/main" xmlns="">
                 <a:effectLst>
                   <a:outerShdw dist="35921" dir="2700000" algn="ctr" rotWithShape="0">
                     <a:schemeClr val="bg2"/>
@@ -25191,7 +25493,7 @@
           </a:ln>
           <a:extLst>
             <a:ext uri="{AF507438-7753-43e0-B8FC-AC1667EBCBE1}">
-              <a14:hiddenEffects xmlns="" xmlns:a14="http://schemas.microsoft.com/office/drawing/2010/main">
+              <a14:hiddenEffects xmlns:a14="http://schemas.microsoft.com/office/drawing/2010/main" xmlns="">
                 <a:effectLst>
                   <a:outerShdw dist="35921" dir="2700000" algn="ctr" rotWithShape="0">
                     <a:schemeClr val="bg2"/>
@@ -25299,7 +25601,7 @@
           </a:ln>
           <a:extLst>
             <a:ext uri="{AF507438-7753-43e0-B8FC-AC1667EBCBE1}">
-              <a14:hiddenEffects xmlns="" xmlns:a14="http://schemas.microsoft.com/office/drawing/2010/main">
+              <a14:hiddenEffects xmlns:a14="http://schemas.microsoft.com/office/drawing/2010/main" xmlns="">
                 <a:effectLst>
                   <a:outerShdw dist="35921" dir="2700000" algn="ctr" rotWithShape="0">
                     <a:schemeClr val="bg2"/>
@@ -25403,17 +25705,17 @@
           <a:effectLst/>
           <a:extLst>
             <a:ext uri="{FAA26D3D-D897-4be2-8F04-BA451C77F1D7}">
-              <ma14:placeholderFlag xmlns:ma14="http://schemas.microsoft.com/office/mac/drawingml/2011/main" xmlns="" val="1"/>
+              <ma14:placeholderFlag xmlns="" xmlns:ma14="http://schemas.microsoft.com/office/mac/drawingml/2011/main" val="1"/>
             </a:ext>
             <a:ext uri="{909E8E84-426E-40dd-AFC4-6F175D3DCCD1}">
-              <a14:hiddenFill xmlns:a14="http://schemas.microsoft.com/office/drawing/2010/main" xmlns="">
+              <a14:hiddenFill xmlns="" xmlns:a14="http://schemas.microsoft.com/office/drawing/2010/main">
                 <a:solidFill>
                   <a:schemeClr val="bg1"/>
                 </a:solidFill>
               </a14:hiddenFill>
             </a:ext>
             <a:ext uri="{91240B29-F687-4f45-9708-019B960494DF}">
-              <a14:hiddenLine xmlns:a14="http://schemas.microsoft.com/office/drawing/2010/main" xmlns="" w="12700">
+              <a14:hiddenLine xmlns="" xmlns:a14="http://schemas.microsoft.com/office/drawing/2010/main" w="12700">
                 <a:pattFill prst="narHorz">
                   <a:fgClr>
                     <a:schemeClr val="tx1"/>
@@ -25428,7 +25730,7 @@
               </a14:hiddenLine>
             </a:ext>
             <a:ext uri="{AF507438-7753-43e0-B8FC-AC1667EBCBE1}">
-              <a14:hiddenEffects xmlns:a14="http://schemas.microsoft.com/office/drawing/2010/main" xmlns="">
+              <a14:hiddenEffects xmlns="" xmlns:a14="http://schemas.microsoft.com/office/drawing/2010/main">
                 <a:effectLst>
                   <a:outerShdw blurRad="63500" dist="38099" dir="2700000" algn="ctr" rotWithShape="0">
                     <a:schemeClr val="bg2">
@@ -25928,7 +26230,7 @@
         <a:effectLst/>
         <a:extLst>
           <a:ext uri="{AF507438-7753-43e0-B8FC-AC1667EBCBE1}">
-            <a14:hiddenEffects xmlns:a14="http://schemas.microsoft.com/office/drawing/2010/main" xmlns="">
+            <a14:hiddenEffects xmlns="" xmlns:a14="http://schemas.microsoft.com/office/drawing/2010/main">
               <a:effectLst>
                 <a:outerShdw dist="35921" dir="2700000" algn="ctr" rotWithShape="0">
                   <a:schemeClr val="bg2"/>
@@ -26001,7 +26303,7 @@
         <a:effectLst/>
         <a:extLst>
           <a:ext uri="{AF507438-7753-43e0-B8FC-AC1667EBCBE1}">
-            <a14:hiddenEffects xmlns:a14="http://schemas.microsoft.com/office/drawing/2010/main" xmlns="">
+            <a14:hiddenEffects xmlns="" xmlns:a14="http://schemas.microsoft.com/office/drawing/2010/main">
               <a:effectLst>
                 <a:outerShdw dist="35921" dir="2700000" algn="ctr" rotWithShape="0">
                   <a:schemeClr val="bg2"/>

--- a/PPTs/L5-Exercises ANS.pptx
+++ b/PPTs/L5-Exercises ANS.pptx
@@ -12,7 +12,7 @@
   </p:handoutMasterIdLst>
   <p:sldIdLst>
     <p:sldId id="256" r:id="rId2"/>
-    <p:sldId id="1500" r:id="rId3"/>
+    <p:sldId id="1509" r:id="rId3"/>
     <p:sldId id="1501" r:id="rId4"/>
     <p:sldId id="1493" r:id="rId5"/>
     <p:sldId id="1488" r:id="rId6"/>
@@ -347,14 +347,14 @@
           <a:effectLst/>
           <a:extLst>
             <a:ext uri="{909E8E84-426E-40dd-AFC4-6F175D3DCCD1}">
-              <a14:hiddenFill xmlns="" xmlns:a14="http://schemas.microsoft.com/office/drawing/2010/main">
+              <a14:hiddenFill xmlns:a14="http://schemas.microsoft.com/office/drawing/2010/main" xmlns="">
                 <a:solidFill>
                   <a:schemeClr val="bg1"/>
                 </a:solidFill>
               </a14:hiddenFill>
             </a:ext>
             <a:ext uri="{91240B29-F687-4f45-9708-019B960494DF}">
-              <a14:hiddenLine xmlns="" xmlns:a14="http://schemas.microsoft.com/office/drawing/2010/main" w="12700">
+              <a14:hiddenLine xmlns:a14="http://schemas.microsoft.com/office/drawing/2010/main" xmlns="" w="12700">
                 <a:pattFill prst="narHorz">
                   <a:fgClr>
                     <a:schemeClr val="tx1"/>
@@ -369,7 +369,7 @@
               </a14:hiddenLine>
             </a:ext>
             <a:ext uri="{AF507438-7753-43e0-B8FC-AC1667EBCBE1}">
-              <a14:hiddenEffects xmlns="" xmlns:a14="http://schemas.microsoft.com/office/drawing/2010/main">
+              <a14:hiddenEffects xmlns:a14="http://schemas.microsoft.com/office/drawing/2010/main" xmlns="">
                 <a:effectLst>
                   <a:outerShdw dist="35921" dir="2700000" algn="ctr" rotWithShape="0">
                     <a:schemeClr val="bg2"/>
@@ -475,14 +475,14 @@
           <a:effectLst/>
           <a:extLst>
             <a:ext uri="{909E8E84-426E-40dd-AFC4-6F175D3DCCD1}">
-              <a14:hiddenFill xmlns="" xmlns:a14="http://schemas.microsoft.com/office/drawing/2010/main">
+              <a14:hiddenFill xmlns:a14="http://schemas.microsoft.com/office/drawing/2010/main" xmlns="">
                 <a:solidFill>
                   <a:schemeClr val="bg1"/>
                 </a:solidFill>
               </a14:hiddenFill>
             </a:ext>
             <a:ext uri="{91240B29-F687-4f45-9708-019B960494DF}">
-              <a14:hiddenLine xmlns="" xmlns:a14="http://schemas.microsoft.com/office/drawing/2010/main" w="12700">
+              <a14:hiddenLine xmlns:a14="http://schemas.microsoft.com/office/drawing/2010/main" xmlns="" w="12700">
                 <a:pattFill prst="narHorz">
                   <a:fgClr>
                     <a:schemeClr val="tx1"/>
@@ -497,7 +497,7 @@
               </a14:hiddenLine>
             </a:ext>
             <a:ext uri="{AF507438-7753-43e0-B8FC-AC1667EBCBE1}">
-              <a14:hiddenEffects xmlns="" xmlns:a14="http://schemas.microsoft.com/office/drawing/2010/main">
+              <a14:hiddenEffects xmlns:a14="http://schemas.microsoft.com/office/drawing/2010/main" xmlns="">
                 <a:effectLst>
                   <a:outerShdw dist="35921" dir="2700000" algn="ctr" rotWithShape="0">
                     <a:schemeClr val="bg2"/>
@@ -565,17 +565,17 @@
           <a:effectLst/>
           <a:extLst>
             <a:ext uri="{FAA26D3D-D897-4be2-8F04-BA451C77F1D7}">
-              <ma14:placeholderFlag xmlns="" xmlns:ma14="http://schemas.microsoft.com/office/mac/drawingml/2011/main" val="1"/>
+              <ma14:placeholderFlag xmlns:ma14="http://schemas.microsoft.com/office/mac/drawingml/2011/main" xmlns="" val="1"/>
             </a:ext>
             <a:ext uri="{909E8E84-426E-40dd-AFC4-6F175D3DCCD1}">
-              <a14:hiddenFill xmlns="" xmlns:a14="http://schemas.microsoft.com/office/drawing/2010/main">
+              <a14:hiddenFill xmlns:a14="http://schemas.microsoft.com/office/drawing/2010/main" xmlns="">
                 <a:solidFill>
                   <a:srgbClr val="FFFFFF"/>
                 </a:solidFill>
               </a14:hiddenFill>
             </a:ext>
             <a:ext uri="{AF507438-7753-43e0-B8FC-AC1667EBCBE1}">
-              <a14:hiddenEffects xmlns="" xmlns:a14="http://schemas.microsoft.com/office/drawing/2010/main">
+              <a14:hiddenEffects xmlns:a14="http://schemas.microsoft.com/office/drawing/2010/main" xmlns="">
                 <a:effectLst>
                   <a:outerShdw blurRad="63500" dist="38099" dir="2700000" algn="ctr" rotWithShape="0">
                     <a:srgbClr val="000000">
@@ -586,7 +586,7 @@
               </a14:hiddenEffects>
             </a:ext>
             <a:ext uri="{53640926-AAD7-44d8-BBD7-CCE9431645EC}">
-              <a14:shadowObscured xmlns="" xmlns:a14="http://schemas.microsoft.com/office/drawing/2010/main" val="1"/>
+              <a14:shadowObscured xmlns:a14="http://schemas.microsoft.com/office/drawing/2010/main" xmlns="" val="1"/>
             </a:ext>
           </a:extLst>
         </p:spPr>
@@ -616,14 +616,14 @@
           <a:effectLst/>
           <a:extLst>
             <a:ext uri="{909E8E84-426E-40dd-AFC4-6F175D3DCCD1}">
-              <a14:hiddenFill xmlns="" xmlns:a14="http://schemas.microsoft.com/office/drawing/2010/main">
+              <a14:hiddenFill xmlns:a14="http://schemas.microsoft.com/office/drawing/2010/main" xmlns="">
                 <a:solidFill>
                   <a:schemeClr val="bg1"/>
                 </a:solidFill>
               </a14:hiddenFill>
             </a:ext>
             <a:ext uri="{91240B29-F687-4f45-9708-019B960494DF}">
-              <a14:hiddenLine xmlns="" xmlns:a14="http://schemas.microsoft.com/office/drawing/2010/main" w="12700">
+              <a14:hiddenLine xmlns:a14="http://schemas.microsoft.com/office/drawing/2010/main" xmlns="" w="12700">
                 <a:pattFill prst="narHorz">
                   <a:fgClr>
                     <a:schemeClr val="tx1"/>
@@ -638,7 +638,7 @@
               </a14:hiddenLine>
             </a:ext>
             <a:ext uri="{AF507438-7753-43e0-B8FC-AC1667EBCBE1}">
-              <a14:hiddenEffects xmlns="" xmlns:a14="http://schemas.microsoft.com/office/drawing/2010/main">
+              <a14:hiddenEffects xmlns:a14="http://schemas.microsoft.com/office/drawing/2010/main" xmlns="">
                 <a:effectLst>
                   <a:outerShdw dist="35921" dir="2700000" algn="ctr" rotWithShape="0">
                     <a:schemeClr val="bg2"/>
@@ -888,10 +888,10 @@
         <p:spPr>
           <a:extLst>
             <a:ext uri="{FAA26D3D-D897-4be2-8F04-BA451C77F1D7}">
-              <ma14:placeholderFlag xmlns="" xmlns:ma14="http://schemas.microsoft.com/office/mac/drawingml/2011/main" val="1"/>
+              <ma14:placeholderFlag xmlns:ma14="http://schemas.microsoft.com/office/mac/drawingml/2011/main" xmlns="" val="1"/>
             </a:ext>
             <a:ext uri="{AF507438-7753-43e0-B8FC-AC1667EBCBE1}">
-              <a14:hiddenEffects xmlns="" xmlns:a14="http://schemas.microsoft.com/office/drawing/2010/main">
+              <a14:hiddenEffects xmlns:a14="http://schemas.microsoft.com/office/drawing/2010/main" xmlns="">
                 <a:effectLst>
                   <a:outerShdw blurRad="63500" dist="38099" dir="2700000" algn="ctr" rotWithShape="0">
                     <a:schemeClr val="bg2">
@@ -3337,17 +3337,17 @@
           <a:effectLst/>
           <a:extLst>
             <a:ext uri="{FAA26D3D-D897-4be2-8F04-BA451C77F1D7}">
-              <ma14:placeholderFlag xmlns="" xmlns:ma14="http://schemas.microsoft.com/office/mac/drawingml/2011/main" val="1"/>
+              <ma14:placeholderFlag xmlns:ma14="http://schemas.microsoft.com/office/mac/drawingml/2011/main" xmlns="" val="1"/>
             </a:ext>
             <a:ext uri="{909E8E84-426E-40dd-AFC4-6F175D3DCCD1}">
-              <a14:hiddenFill xmlns="" xmlns:a14="http://schemas.microsoft.com/office/drawing/2010/main">
+              <a14:hiddenFill xmlns:a14="http://schemas.microsoft.com/office/drawing/2010/main" xmlns="">
                 <a:solidFill>
                   <a:schemeClr val="bg1"/>
                 </a:solidFill>
               </a14:hiddenFill>
             </a:ext>
             <a:ext uri="{91240B29-F687-4f45-9708-019B960494DF}">
-              <a14:hiddenLine xmlns="" xmlns:a14="http://schemas.microsoft.com/office/drawing/2010/main" w="12700">
+              <a14:hiddenLine xmlns:a14="http://schemas.microsoft.com/office/drawing/2010/main" xmlns="" w="12700">
                 <a:pattFill prst="narHorz">
                   <a:fgClr>
                     <a:schemeClr val="tx1"/>
@@ -3362,7 +3362,7 @@
               </a14:hiddenLine>
             </a:ext>
             <a:ext uri="{AF507438-7753-43e0-B8FC-AC1667EBCBE1}">
-              <a14:hiddenEffects xmlns="" xmlns:a14="http://schemas.microsoft.com/office/drawing/2010/main">
+              <a14:hiddenEffects xmlns:a14="http://schemas.microsoft.com/office/drawing/2010/main" xmlns="">
                 <a:effectLst>
                   <a:outerShdw blurRad="63500" dist="38099" dir="2700000" algn="ctr" rotWithShape="0">
                     <a:schemeClr val="bg2">
@@ -3415,17 +3415,17 @@
           <a:effectLst/>
           <a:extLst>
             <a:ext uri="{FAA26D3D-D897-4be2-8F04-BA451C77F1D7}">
-              <ma14:placeholderFlag xmlns="" xmlns:ma14="http://schemas.microsoft.com/office/mac/drawingml/2011/main" val="1"/>
+              <ma14:placeholderFlag xmlns:ma14="http://schemas.microsoft.com/office/mac/drawingml/2011/main" xmlns="" val="1"/>
             </a:ext>
             <a:ext uri="{909E8E84-426E-40dd-AFC4-6F175D3DCCD1}">
-              <a14:hiddenFill xmlns="" xmlns:a14="http://schemas.microsoft.com/office/drawing/2010/main">
+              <a14:hiddenFill xmlns:a14="http://schemas.microsoft.com/office/drawing/2010/main" xmlns="">
                 <a:solidFill>
                   <a:schemeClr val="bg1"/>
                 </a:solidFill>
               </a14:hiddenFill>
             </a:ext>
             <a:ext uri="{91240B29-F687-4f45-9708-019B960494DF}">
-              <a14:hiddenLine xmlns="" xmlns:a14="http://schemas.microsoft.com/office/drawing/2010/main" w="12700">
+              <a14:hiddenLine xmlns:a14="http://schemas.microsoft.com/office/drawing/2010/main" xmlns="" w="12700">
                 <a:pattFill prst="narHorz">
                   <a:fgClr>
                     <a:schemeClr val="tx1"/>
@@ -3440,7 +3440,7 @@
               </a14:hiddenLine>
             </a:ext>
             <a:ext uri="{AF507438-7753-43e0-B8FC-AC1667EBCBE1}">
-              <a14:hiddenEffects xmlns="" xmlns:a14="http://schemas.microsoft.com/office/drawing/2010/main">
+              <a14:hiddenEffects xmlns:a14="http://schemas.microsoft.com/office/drawing/2010/main" xmlns="">
                 <a:effectLst>
                   <a:outerShdw blurRad="63500" dist="38099" dir="2700000" algn="ctr" rotWithShape="0">
                     <a:schemeClr val="bg2">
@@ -3519,14 +3519,14 @@
           <a:effectLst/>
           <a:extLst>
             <a:ext uri="{909E8E84-426E-40dd-AFC4-6F175D3DCCD1}">
-              <a14:hiddenFill xmlns="" xmlns:a14="http://schemas.microsoft.com/office/drawing/2010/main">
+              <a14:hiddenFill xmlns:a14="http://schemas.microsoft.com/office/drawing/2010/main" xmlns="">
                 <a:solidFill>
                   <a:schemeClr val="bg1"/>
                 </a:solidFill>
               </a14:hiddenFill>
             </a:ext>
             <a:ext uri="{91240B29-F687-4f45-9708-019B960494DF}">
-              <a14:hiddenLine xmlns="" xmlns:a14="http://schemas.microsoft.com/office/drawing/2010/main" w="12700">
+              <a14:hiddenLine xmlns:a14="http://schemas.microsoft.com/office/drawing/2010/main" xmlns="" w="12700">
                 <a:pattFill prst="narHorz">
                   <a:fgClr>
                     <a:schemeClr val="tx1"/>
@@ -3541,7 +3541,7 @@
               </a14:hiddenLine>
             </a:ext>
             <a:ext uri="{AF507438-7753-43e0-B8FC-AC1667EBCBE1}">
-              <a14:hiddenEffects xmlns="" xmlns:a14="http://schemas.microsoft.com/office/drawing/2010/main">
+              <a14:hiddenEffects xmlns:a14="http://schemas.microsoft.com/office/drawing/2010/main" xmlns="">
                 <a:effectLst>
                   <a:outerShdw dist="35921" dir="2700000" algn="ctr" rotWithShape="0">
                     <a:schemeClr val="bg2"/>
@@ -3607,12 +3607,12 @@
           <a:effectLst/>
           <a:extLst>
             <a:ext uri="{909E8E84-426E-40dd-AFC4-6F175D3DCCD1}">
-              <a14:hiddenFill xmlns="" xmlns:a14="http://schemas.microsoft.com/office/drawing/2010/main">
+              <a14:hiddenFill xmlns:a14="http://schemas.microsoft.com/office/drawing/2010/main" xmlns="">
                 <a:noFill/>
               </a14:hiddenFill>
             </a:ext>
             <a:ext uri="{AF507438-7753-43e0-B8FC-AC1667EBCBE1}">
-              <a14:hiddenEffects xmlns="" xmlns:a14="http://schemas.microsoft.com/office/drawing/2010/main">
+              <a14:hiddenEffects xmlns:a14="http://schemas.microsoft.com/office/drawing/2010/main" xmlns="">
                 <a:effectLst>
                   <a:outerShdw blurRad="63500" dist="38099" dir="2700000" algn="ctr" rotWithShape="0">
                     <a:schemeClr val="bg2">
@@ -6005,7 +6005,7 @@
           </a:ln>
           <a:extLst>
             <a:ext uri="{AF507438-7753-43e0-B8FC-AC1667EBCBE1}">
-              <a14:hiddenEffects xmlns:a14="http://schemas.microsoft.com/office/drawing/2010/main" xmlns="">
+              <a14:hiddenEffects xmlns="" xmlns:a14="http://schemas.microsoft.com/office/drawing/2010/main">
                 <a:effectLst>
                   <a:outerShdw dist="35921" dir="2700000" algn="ctr" rotWithShape="0">
                     <a:schemeClr val="bg2"/>
@@ -6113,7 +6113,7 @@
           </a:ln>
           <a:extLst>
             <a:ext uri="{AF507438-7753-43e0-B8FC-AC1667EBCBE1}">
-              <a14:hiddenEffects xmlns:a14="http://schemas.microsoft.com/office/drawing/2010/main" xmlns="">
+              <a14:hiddenEffects xmlns="" xmlns:a14="http://schemas.microsoft.com/office/drawing/2010/main">
                 <a:effectLst>
                   <a:outerShdw dist="35921" dir="2700000" algn="ctr" rotWithShape="0">
                     <a:schemeClr val="bg2"/>
@@ -6223,7 +6223,7 @@
           </a:ln>
           <a:extLst>
             <a:ext uri="{AF507438-7753-43e0-B8FC-AC1667EBCBE1}">
-              <a14:hiddenEffects xmlns:a14="http://schemas.microsoft.com/office/drawing/2010/main" xmlns="">
+              <a14:hiddenEffects xmlns="" xmlns:a14="http://schemas.microsoft.com/office/drawing/2010/main">
                 <a:effectLst>
                   <a:outerShdw dist="35921" dir="2700000" algn="ctr" rotWithShape="0">
                     <a:schemeClr val="bg2"/>
@@ -8496,7 +8496,7 @@
           </a:ln>
           <a:extLst>
             <a:ext uri="{AF507438-7753-43e0-B8FC-AC1667EBCBE1}">
-              <a14:hiddenEffects xmlns:a14="http://schemas.microsoft.com/office/drawing/2010/main" xmlns="">
+              <a14:hiddenEffects xmlns="" xmlns:a14="http://schemas.microsoft.com/office/drawing/2010/main">
                 <a:effectLst>
                   <a:outerShdw dist="35921" dir="2700000" algn="ctr" rotWithShape="0">
                     <a:schemeClr val="bg2"/>
@@ -10882,7 +10882,7 @@
           </a:ln>
           <a:extLst>
             <a:ext uri="{AF507438-7753-43e0-B8FC-AC1667EBCBE1}">
-              <a14:hiddenEffects xmlns:a14="http://schemas.microsoft.com/office/drawing/2010/main" xmlns="">
+              <a14:hiddenEffects xmlns="" xmlns:a14="http://schemas.microsoft.com/office/drawing/2010/main">
                 <a:effectLst>
                   <a:outerShdw dist="35921" dir="2700000" algn="ctr" rotWithShape="0">
                     <a:schemeClr val="bg2"/>
@@ -10990,7 +10990,7 @@
           </a:ln>
           <a:extLst>
             <a:ext uri="{AF507438-7753-43e0-B8FC-AC1667EBCBE1}">
-              <a14:hiddenEffects xmlns:a14="http://schemas.microsoft.com/office/drawing/2010/main" xmlns="">
+              <a14:hiddenEffects xmlns="" xmlns:a14="http://schemas.microsoft.com/office/drawing/2010/main">
                 <a:effectLst>
                   <a:outerShdw dist="35921" dir="2700000" algn="ctr" rotWithShape="0">
                     <a:schemeClr val="bg2"/>
@@ -11098,7 +11098,7 @@
           </a:ln>
           <a:extLst>
             <a:ext uri="{AF507438-7753-43e0-B8FC-AC1667EBCBE1}">
-              <a14:hiddenEffects xmlns:a14="http://schemas.microsoft.com/office/drawing/2010/main" xmlns="">
+              <a14:hiddenEffects xmlns="" xmlns:a14="http://schemas.microsoft.com/office/drawing/2010/main">
                 <a:effectLst>
                   <a:outerShdw dist="35921" dir="2700000" algn="ctr" rotWithShape="0">
                     <a:schemeClr val="bg2"/>
@@ -11245,7 +11245,13 @@
   <p:cSld>
     <p:spTree>
       <p:nvGrpSpPr>
-        <p:cNvPr id="1" name=""/>
+        <p:cNvPr id="1" name="">
+          <a:extLst>
+            <a:ext uri="{FF2B5EF4-FFF2-40B4-BE49-F238E27FC236}">
+              <a16:creationId xmlns:a16="http://schemas.microsoft.com/office/drawing/2014/main" id="{734097A1-818B-0433-C393-1C7725720D08}"/>
+            </a:ext>
+          </a:extLst>
+        </p:cNvPr>
         <p:cNvGrpSpPr/>
         <p:nvPr/>
       </p:nvGrpSpPr>
@@ -11262,7 +11268,7 @@
           <p:cNvPr id="2" name="Title 1">
             <a:extLst>
               <a:ext uri="{FF2B5EF4-FFF2-40B4-BE49-F238E27FC236}">
-                <a16:creationId xmlns:a16="http://schemas.microsoft.com/office/drawing/2014/main" id="{F4C8165B-77B3-A766-647F-94728AAE698E}"/>
+                <a16:creationId xmlns:a16="http://schemas.microsoft.com/office/drawing/2014/main" id="{C4F59529-917F-23B2-366C-58CBE8D4F380}"/>
               </a:ext>
             </a:extLst>
           </p:cNvPr>
@@ -11280,221 +11286,353 @@
           <a:p>
             <a:r>
               <a:rPr lang="en-GB" dirty="0"/>
-              <a:t>Predicting Burst Time</a:t>
+              <a:t>Predicting </a:t>
+            </a:r>
+            <a:r>
+              <a:rPr lang="en-GB"/>
+              <a:t>Burst Time</a:t>
             </a:r>
             <a:endParaRPr lang="en-SE" dirty="0"/>
           </a:p>
         </p:txBody>
       </p:sp>
-      <p:sp>
-        <p:nvSpPr>
-          <p:cNvPr id="3" name="Content Placeholder 2">
-            <a:extLst>
-              <a:ext uri="{FF2B5EF4-FFF2-40B4-BE49-F238E27FC236}">
-                <a16:creationId xmlns:a16="http://schemas.microsoft.com/office/drawing/2014/main" id="{A568D32D-8A26-D01F-B9B1-DC028CCAB513}"/>
-              </a:ext>
-            </a:extLst>
-          </p:cNvPr>
-          <p:cNvSpPr>
-            <a:spLocks noGrp="1"/>
-          </p:cNvSpPr>
-          <p:nvPr>
-            <p:ph idx="1"/>
-          </p:nvPr>
-        </p:nvSpPr>
-        <p:spPr/>
-        <p:txBody>
-          <a:bodyPr>
-            <a:normAutofit/>
-          </a:bodyPr>
-          <a:lstStyle/>
-          <a:p>
-            <a:r>
-              <a:rPr lang="en-US" altLang="ko-KR" dirty="0"/>
-              <a:t>Use </a:t>
-            </a:r>
-            <a:r>
-              <a:rPr lang="en-US" altLang="ko-KR" sz="2800" dirty="0"/>
-              <a:t>exponential averaging  </a:t>
-            </a:r>
-            <a:r>
-              <a:rPr lang="en-US" altLang="ko-KR" sz="2800" dirty="0">
-                <a:sym typeface="Symbol" panose="05050102010706020507" pitchFamily="18" charset="2"/>
-              </a:rPr>
-              <a:t></a:t>
-            </a:r>
-            <a:r>
-              <a:rPr lang="en-US" altLang="ko-KR" sz="2800" baseline="-25000" dirty="0">
-                <a:sym typeface="Symbol" panose="05050102010706020507" pitchFamily="18" charset="2"/>
-              </a:rPr>
-              <a:t>n</a:t>
-            </a:r>
-            <a:r>
-              <a:rPr lang="en-US" altLang="ko-KR" sz="2800" dirty="0">
-                <a:sym typeface="Symbol" panose="05050102010706020507" pitchFamily="18" charset="2"/>
-              </a:rPr>
-              <a:t> = t</a:t>
-            </a:r>
-            <a:r>
-              <a:rPr lang="en-US" altLang="ko-KR" sz="2800" baseline="-25000" dirty="0">
-                <a:sym typeface="Symbol" panose="05050102010706020507" pitchFamily="18" charset="2"/>
-              </a:rPr>
-              <a:t>n-1</a:t>
-            </a:r>
-            <a:r>
-              <a:rPr lang="en-US" altLang="ko-KR" sz="2800" dirty="0">
-                <a:sym typeface="Symbol" panose="05050102010706020507" pitchFamily="18" charset="2"/>
-              </a:rPr>
-              <a:t>+(1-)</a:t>
-            </a:r>
-            <a:r>
-              <a:rPr lang="en-US" altLang="ko-KR" sz="2800" baseline="-25000" dirty="0">
-                <a:sym typeface="Symbol" panose="05050102010706020507" pitchFamily="18" charset="2"/>
-              </a:rPr>
-              <a:t>n-1</a:t>
-            </a:r>
-            <a:r>
-              <a:rPr lang="en-US" altLang="ko-KR" sz="2800" dirty="0">
-                <a:sym typeface="Symbol" panose="05050102010706020507" pitchFamily="18" charset="2"/>
-              </a:rPr>
-              <a:t> to predict the next burst time. Assume initial estimate </a:t>
-            </a:r>
-            <a:r>
-              <a:rPr lang="en-US" altLang="ko-KR" sz="2800" baseline="-25000" dirty="0">
-                <a:sym typeface="Symbol" panose="05050102010706020507" pitchFamily="18" charset="2"/>
-              </a:rPr>
-              <a:t>0</a:t>
-            </a:r>
-            <a:r>
-              <a:rPr lang="en-US" altLang="ko-KR" sz="2800" dirty="0">
-                <a:sym typeface="Symbol" panose="05050102010706020507" pitchFamily="18" charset="2"/>
-              </a:rPr>
-              <a:t> = 10, and the </a:t>
-            </a:r>
-            <a:r>
-              <a:rPr lang="en-GB" dirty="0"/>
-              <a:t>actual burst times of the first four processes </a:t>
-            </a:r>
-            <a:r>
-              <a:rPr lang="en-US" altLang="ko-KR" sz="2800" dirty="0">
-                <a:sym typeface="Symbol" panose="05050102010706020507" pitchFamily="18" charset="2"/>
-              </a:rPr>
-              <a:t>t</a:t>
-            </a:r>
-            <a:r>
-              <a:rPr lang="en-US" altLang="ko-KR" sz="2800" baseline="-25000" dirty="0">
-                <a:sym typeface="Symbol" panose="05050102010706020507" pitchFamily="18" charset="2"/>
-              </a:rPr>
-              <a:t>0</a:t>
-            </a:r>
-            <a:r>
-              <a:rPr lang="en-GB" dirty="0"/>
-              <a:t>, </a:t>
-            </a:r>
-            <a:r>
-              <a:rPr lang="en-US" altLang="ko-KR" sz="2800" dirty="0">
-                <a:sym typeface="Symbol" panose="05050102010706020507" pitchFamily="18" charset="2"/>
-              </a:rPr>
-              <a:t>t</a:t>
-            </a:r>
-            <a:r>
-              <a:rPr lang="en-US" altLang="ko-KR" sz="2800" baseline="-25000" dirty="0">
-                <a:sym typeface="Symbol" panose="05050102010706020507" pitchFamily="18" charset="2"/>
-              </a:rPr>
-              <a:t>1</a:t>
-            </a:r>
-            <a:r>
-              <a:rPr lang="en-GB" dirty="0"/>
-              <a:t>, </a:t>
-            </a:r>
-            <a:r>
-              <a:rPr lang="en-US" altLang="ko-KR" sz="2800" dirty="0">
-                <a:sym typeface="Symbol" panose="05050102010706020507" pitchFamily="18" charset="2"/>
-              </a:rPr>
-              <a:t>t</a:t>
-            </a:r>
-            <a:r>
-              <a:rPr lang="en-US" altLang="ko-KR" sz="2800" baseline="-25000" dirty="0">
-                <a:sym typeface="Symbol" panose="05050102010706020507" pitchFamily="18" charset="2"/>
-              </a:rPr>
-              <a:t>2</a:t>
-            </a:r>
-            <a:r>
-              <a:rPr lang="en-GB" dirty="0"/>
-              <a:t>, </a:t>
-            </a:r>
-            <a:r>
-              <a:rPr lang="en-US" altLang="ko-KR" sz="2800" dirty="0">
-                <a:sym typeface="Symbol" panose="05050102010706020507" pitchFamily="18" charset="2"/>
-              </a:rPr>
-              <a:t>t</a:t>
-            </a:r>
-            <a:r>
-              <a:rPr lang="en-US" altLang="ko-KR" sz="2800" baseline="-25000" dirty="0">
-                <a:sym typeface="Symbol" panose="05050102010706020507" pitchFamily="18" charset="2"/>
-              </a:rPr>
-              <a:t>3</a:t>
-            </a:r>
-            <a:r>
-              <a:rPr lang="en-GB" dirty="0"/>
-              <a:t> are 4, 8, 6 and 7, respectively. Given α = 0.5. Compute the predicted burst times </a:t>
-            </a:r>
-            <a:r>
-              <a:rPr lang="en-US" altLang="ko-KR" sz="2800" dirty="0">
-                <a:sym typeface="Symbol" panose="05050102010706020507" pitchFamily="18" charset="2"/>
-              </a:rPr>
-              <a:t></a:t>
-            </a:r>
-            <a:r>
-              <a:rPr lang="en-US" altLang="ko-KR" sz="2800" baseline="-25000" dirty="0">
-                <a:sym typeface="Symbol" panose="05050102010706020507" pitchFamily="18" charset="2"/>
-              </a:rPr>
-              <a:t>1</a:t>
-            </a:r>
-            <a:r>
-              <a:rPr lang="en-US" altLang="ko-KR" sz="2800" dirty="0">
-                <a:sym typeface="Symbol" panose="05050102010706020507" pitchFamily="18" charset="2"/>
-              </a:rPr>
-              <a:t>, </a:t>
-            </a:r>
-            <a:r>
-              <a:rPr lang="en-US" altLang="ko-KR" sz="2800" baseline="-25000" dirty="0">
-                <a:sym typeface="Symbol" panose="05050102010706020507" pitchFamily="18" charset="2"/>
-              </a:rPr>
-              <a:t>2</a:t>
-            </a:r>
-            <a:r>
-              <a:rPr lang="en-US" altLang="ko-KR" sz="2800" dirty="0">
-                <a:sym typeface="Symbol" panose="05050102010706020507" pitchFamily="18" charset="2"/>
-              </a:rPr>
-              <a:t>, </a:t>
-            </a:r>
-            <a:r>
-              <a:rPr lang="en-US" altLang="ko-KR" sz="2800" baseline="-25000" dirty="0">
-                <a:sym typeface="Symbol" panose="05050102010706020507" pitchFamily="18" charset="2"/>
-              </a:rPr>
-              <a:t>3</a:t>
-            </a:r>
-            <a:r>
-              <a:rPr lang="en-US" altLang="ko-KR" sz="2800" dirty="0">
-                <a:sym typeface="Symbol" panose="05050102010706020507" pitchFamily="18" charset="2"/>
-              </a:rPr>
-              <a:t>, </a:t>
-            </a:r>
-            <a:r>
-              <a:rPr lang="en-US" altLang="ko-KR" sz="2800" baseline="-25000" dirty="0">
-                <a:sym typeface="Symbol" panose="05050102010706020507" pitchFamily="18" charset="2"/>
-              </a:rPr>
-              <a:t>4. </a:t>
-            </a:r>
-            <a:endParaRPr lang="en-GB" dirty="0"/>
-          </a:p>
-        </p:txBody>
-      </p:sp>
+      <mc:AlternateContent xmlns:mc="http://schemas.openxmlformats.org/markup-compatibility/2006">
+        <mc:Choice xmlns:a14="http://schemas.microsoft.com/office/drawing/2010/main" Requires="a14">
+          <p:sp>
+            <p:nvSpPr>
+              <p:cNvPr id="3" name="Content Placeholder 2">
+                <a:extLst>
+                  <a:ext uri="{FF2B5EF4-FFF2-40B4-BE49-F238E27FC236}">
+                    <a16:creationId xmlns:a16="http://schemas.microsoft.com/office/drawing/2014/main" id="{536D5D6A-762F-49E5-475F-C3B6FCA03C63}"/>
+                  </a:ext>
+                </a:extLst>
+              </p:cNvPr>
+              <p:cNvSpPr>
+                <a:spLocks noGrp="1"/>
+              </p:cNvSpPr>
+              <p:nvPr>
+                <p:ph idx="1"/>
+              </p:nvPr>
+            </p:nvSpPr>
+            <p:spPr/>
+            <p:txBody>
+              <a:bodyPr>
+                <a:normAutofit/>
+              </a:bodyPr>
+              <a:lstStyle/>
+              <a:p>
+                <a:r>
+                  <a:rPr lang="en-US" altLang="ko-KR" dirty="0"/>
+                  <a:t>Use </a:t>
+                </a:r>
+                <a:r>
+                  <a:rPr lang="en-US" altLang="ko-KR" sz="2800" dirty="0"/>
+                  <a:t>exponential averaging </a:t>
+                </a:r>
+                <a14:m>
+                  <m:oMath xmlns:m="http://schemas.openxmlformats.org/officeDocument/2006/math">
+                    <m:sSub>
+                      <m:sSubPr>
+                        <m:ctrlPr>
+                          <a:rPr lang="en-US" i="1">
+                            <a:latin typeface="Cambria Math" panose="02040503050406030204" pitchFamily="18" charset="0"/>
+                          </a:rPr>
+                        </m:ctrlPr>
+                      </m:sSubPr>
+                      <m:e>
+                        <m:r>
+                          <a:rPr lang="en-US" i="1">
+                            <a:latin typeface="Cambria Math" panose="02040503050406030204" pitchFamily="18" charset="0"/>
+                          </a:rPr>
+                          <m:t>𝜏</m:t>
+                        </m:r>
+                      </m:e>
+                      <m:sub>
+                        <m:r>
+                          <a:rPr lang="en-US" i="1">
+                            <a:latin typeface="Cambria Math" panose="02040503050406030204" pitchFamily="18" charset="0"/>
+                          </a:rPr>
+                          <m:t>𝑛</m:t>
+                        </m:r>
+                        <m:r>
+                          <a:rPr lang="en-US" i="1">
+                            <a:latin typeface="Cambria Math" panose="02040503050406030204" pitchFamily="18" charset="0"/>
+                          </a:rPr>
+                          <m:t>+1</m:t>
+                        </m:r>
+                      </m:sub>
+                    </m:sSub>
+                    <m:r>
+                      <a:rPr lang="en-US" i="1">
+                        <a:latin typeface="Cambria Math" panose="02040503050406030204" pitchFamily="18" charset="0"/>
+                      </a:rPr>
+                      <m:t>=</m:t>
+                    </m:r>
+                    <m:r>
+                      <a:rPr lang="en-US" b="0" i="1" smtClean="0">
+                        <a:latin typeface="Cambria Math" panose="02040503050406030204" pitchFamily="18" charset="0"/>
+                      </a:rPr>
+                      <m:t>𝛼</m:t>
+                    </m:r>
+                    <m:sSub>
+                      <m:sSubPr>
+                        <m:ctrlPr>
+                          <a:rPr lang="en-US" i="1">
+                            <a:latin typeface="Cambria Math" panose="02040503050406030204" pitchFamily="18" charset="0"/>
+                          </a:rPr>
+                        </m:ctrlPr>
+                      </m:sSubPr>
+                      <m:e>
+                        <m:r>
+                          <a:rPr lang="en-US" i="1">
+                            <a:latin typeface="Cambria Math" panose="02040503050406030204" pitchFamily="18" charset="0"/>
+                          </a:rPr>
+                          <m:t>𝑡</m:t>
+                        </m:r>
+                      </m:e>
+                      <m:sub>
+                        <m:r>
+                          <a:rPr lang="en-US" i="1">
+                            <a:latin typeface="Cambria Math" panose="02040503050406030204" pitchFamily="18" charset="0"/>
+                          </a:rPr>
+                          <m:t>𝑛</m:t>
+                        </m:r>
+                      </m:sub>
+                    </m:sSub>
+                    <m:r>
+                      <a:rPr lang="en-US" i="1">
+                        <a:latin typeface="Cambria Math" panose="02040503050406030204" pitchFamily="18" charset="0"/>
+                      </a:rPr>
+                      <m:t>+(1−</m:t>
+                    </m:r>
+                    <m:r>
+                      <a:rPr lang="en-US" altLang="zh-CN" i="1">
+                        <a:latin typeface="Cambria Math" panose="02040503050406030204" pitchFamily="18" charset="0"/>
+                      </a:rPr>
+                      <m:t>𝛼</m:t>
+                    </m:r>
+                    <m:r>
+                      <a:rPr lang="en-US" i="1">
+                        <a:latin typeface="Cambria Math" panose="02040503050406030204" pitchFamily="18" charset="0"/>
+                      </a:rPr>
+                      <m:t>)</m:t>
+                    </m:r>
+                    <m:sSub>
+                      <m:sSubPr>
+                        <m:ctrlPr>
+                          <a:rPr lang="en-US" i="1">
+                            <a:latin typeface="Cambria Math" panose="02040503050406030204" pitchFamily="18" charset="0"/>
+                          </a:rPr>
+                        </m:ctrlPr>
+                      </m:sSubPr>
+                      <m:e>
+                        <m:r>
+                          <a:rPr lang="en-US" i="1">
+                            <a:latin typeface="Cambria Math" panose="02040503050406030204" pitchFamily="18" charset="0"/>
+                          </a:rPr>
+                          <m:t>𝜏</m:t>
+                        </m:r>
+                      </m:e>
+                      <m:sub>
+                        <m:r>
+                          <a:rPr lang="en-US" i="1">
+                            <a:latin typeface="Cambria Math" panose="02040503050406030204" pitchFamily="18" charset="0"/>
+                          </a:rPr>
+                          <m:t>𝑛</m:t>
+                        </m:r>
+                      </m:sub>
+                    </m:sSub>
+                  </m:oMath>
+                </a14:m>
+                <a:r>
+                  <a:rPr lang="en-US" altLang="ko-KR" sz="2800" dirty="0">
+                    <a:sym typeface="Symbol" panose="05050102010706020507" pitchFamily="18" charset="2"/>
+                  </a:rPr>
+                  <a:t> to predict the next burst time. Assume initial estimate </a:t>
+                </a:r>
+                <a:r>
+                  <a:rPr lang="en-US" altLang="ko-KR" dirty="0">
+                    <a:sym typeface="Symbol" panose="05050102010706020507" pitchFamily="18" charset="2"/>
+                  </a:rPr>
+                  <a:t></a:t>
+                </a:r>
+                <a:r>
+                  <a:rPr lang="en-US" altLang="ko-KR" sz="2800" baseline="-25000" dirty="0">
+                    <a:sym typeface="Symbol" panose="05050102010706020507" pitchFamily="18" charset="2"/>
+                  </a:rPr>
+                  <a:t>0</a:t>
+                </a:r>
+                <a:r>
+                  <a:rPr lang="en-US" altLang="ko-KR" sz="2800" dirty="0">
+                    <a:sym typeface="Symbol" panose="05050102010706020507" pitchFamily="18" charset="2"/>
+                  </a:rPr>
+                  <a:t> = 10, and the </a:t>
+                </a:r>
+                <a:r>
+                  <a:rPr lang="en-GB" dirty="0"/>
+                  <a:t>actual burst times of the first four processes </a:t>
+                </a:r>
+                <a:r>
+                  <a:rPr lang="en-US" altLang="ko-KR" sz="2800" dirty="0">
+                    <a:sym typeface="Symbol" panose="05050102010706020507" pitchFamily="18" charset="2"/>
+                  </a:rPr>
+                  <a:t>t</a:t>
+                </a:r>
+                <a:r>
+                  <a:rPr lang="en-US" altLang="ko-KR" sz="2800" baseline="-25000" dirty="0">
+                    <a:sym typeface="Symbol" panose="05050102010706020507" pitchFamily="18" charset="2"/>
+                  </a:rPr>
+                  <a:t>0</a:t>
+                </a:r>
+                <a:r>
+                  <a:rPr lang="en-GB" dirty="0"/>
+                  <a:t>, </a:t>
+                </a:r>
+                <a:r>
+                  <a:rPr lang="en-US" altLang="ko-KR" sz="2800" dirty="0">
+                    <a:sym typeface="Symbol" panose="05050102010706020507" pitchFamily="18" charset="2"/>
+                  </a:rPr>
+                  <a:t>t</a:t>
+                </a:r>
+                <a:r>
+                  <a:rPr lang="en-US" altLang="ko-KR" sz="2800" baseline="-25000" dirty="0">
+                    <a:sym typeface="Symbol" panose="05050102010706020507" pitchFamily="18" charset="2"/>
+                  </a:rPr>
+                  <a:t>1</a:t>
+                </a:r>
+                <a:r>
+                  <a:rPr lang="en-GB" dirty="0"/>
+                  <a:t>, </a:t>
+                </a:r>
+                <a:r>
+                  <a:rPr lang="en-US" altLang="ko-KR" sz="2800" dirty="0">
+                    <a:sym typeface="Symbol" panose="05050102010706020507" pitchFamily="18" charset="2"/>
+                  </a:rPr>
+                  <a:t>t</a:t>
+                </a:r>
+                <a:r>
+                  <a:rPr lang="en-US" altLang="ko-KR" sz="2800" baseline="-25000" dirty="0">
+                    <a:sym typeface="Symbol" panose="05050102010706020507" pitchFamily="18" charset="2"/>
+                  </a:rPr>
+                  <a:t>2</a:t>
+                </a:r>
+                <a:r>
+                  <a:rPr lang="en-GB" dirty="0"/>
+                  <a:t>, </a:t>
+                </a:r>
+                <a:r>
+                  <a:rPr lang="en-US" altLang="ko-KR" sz="2800" dirty="0">
+                    <a:sym typeface="Symbol" panose="05050102010706020507" pitchFamily="18" charset="2"/>
+                  </a:rPr>
+                  <a:t>t</a:t>
+                </a:r>
+                <a:r>
+                  <a:rPr lang="en-US" altLang="ko-KR" sz="2800" baseline="-25000" dirty="0">
+                    <a:sym typeface="Symbol" panose="05050102010706020507" pitchFamily="18" charset="2"/>
+                  </a:rPr>
+                  <a:t>3</a:t>
+                </a:r>
+                <a:r>
+                  <a:rPr lang="en-GB" dirty="0"/>
+                  <a:t> are 4, 8, 6 and 7, respectively. Given α = 0.5. Compute the predicted burst times </a:t>
+                </a:r>
+                <a:r>
+                  <a:rPr lang="en-US" altLang="ko-KR" sz="2800" dirty="0">
+                    <a:sym typeface="Symbol" panose="05050102010706020507" pitchFamily="18" charset="2"/>
+                  </a:rPr>
+                  <a:t></a:t>
+                </a:r>
+                <a:r>
+                  <a:rPr lang="en-US" altLang="ko-KR" sz="2800" baseline="-25000" dirty="0">
+                    <a:sym typeface="Symbol" panose="05050102010706020507" pitchFamily="18" charset="2"/>
+                  </a:rPr>
+                  <a:t>1</a:t>
+                </a:r>
+                <a:r>
+                  <a:rPr lang="en-US" altLang="ko-KR" sz="2800" dirty="0">
+                    <a:sym typeface="Symbol" panose="05050102010706020507" pitchFamily="18" charset="2"/>
+                  </a:rPr>
+                  <a:t>, </a:t>
+                </a:r>
+                <a:r>
+                  <a:rPr lang="en-US" altLang="ko-KR" sz="2800" baseline="-25000" dirty="0">
+                    <a:sym typeface="Symbol" panose="05050102010706020507" pitchFamily="18" charset="2"/>
+                  </a:rPr>
+                  <a:t>2</a:t>
+                </a:r>
+                <a:r>
+                  <a:rPr lang="en-US" altLang="ko-KR" sz="2800" dirty="0">
+                    <a:sym typeface="Symbol" panose="05050102010706020507" pitchFamily="18" charset="2"/>
+                  </a:rPr>
+                  <a:t>, </a:t>
+                </a:r>
+                <a:r>
+                  <a:rPr lang="en-US" altLang="ko-KR" sz="2800" baseline="-25000" dirty="0">
+                    <a:sym typeface="Symbol" panose="05050102010706020507" pitchFamily="18" charset="2"/>
+                  </a:rPr>
+                  <a:t>3</a:t>
+                </a:r>
+                <a:r>
+                  <a:rPr lang="en-US" altLang="ko-KR" sz="2800" dirty="0">
+                    <a:sym typeface="Symbol" panose="05050102010706020507" pitchFamily="18" charset="2"/>
+                  </a:rPr>
+                  <a:t>, </a:t>
+                </a:r>
+                <a:r>
+                  <a:rPr lang="en-US" altLang="ko-KR" sz="2800" baseline="-25000" dirty="0">
+                    <a:sym typeface="Symbol" panose="05050102010706020507" pitchFamily="18" charset="2"/>
+                  </a:rPr>
+                  <a:t>4.</a:t>
+                </a:r>
+                <a:endParaRPr lang="en-GB" dirty="0"/>
+              </a:p>
+            </p:txBody>
+          </p:sp>
+        </mc:Choice>
+        <mc:Fallback>
+          <p:sp>
+            <p:nvSpPr>
+              <p:cNvPr id="3" name="Content Placeholder 2">
+                <a:extLst>
+                  <a:ext uri="{FF2B5EF4-FFF2-40B4-BE49-F238E27FC236}">
+                    <a16:creationId xmlns:a16="http://schemas.microsoft.com/office/drawing/2014/main" id="{536D5D6A-762F-49E5-475F-C3B6FCA03C63}"/>
+                  </a:ext>
+                </a:extLst>
+              </p:cNvPr>
+              <p:cNvSpPr>
+                <a:spLocks noGrp="1" noRot="1" noChangeAspect="1" noMove="1" noResize="1" noEditPoints="1" noAdjustHandles="1" noChangeArrowheads="1" noChangeShapeType="1" noTextEdit="1"/>
+              </p:cNvSpPr>
+              <p:nvPr>
+                <p:ph idx="1"/>
+              </p:nvPr>
+            </p:nvSpPr>
+            <p:spPr>
+              <a:blipFill>
+                <a:blip r:embed="rId2"/>
+                <a:stretch>
+                  <a:fillRect l="-1211" t="-2148" r="-577"/>
+                </a:stretch>
+              </a:blipFill>
+            </p:spPr>
+            <p:txBody>
+              <a:bodyPr/>
+              <a:lstStyle/>
+              <a:p>
+                <a:r>
+                  <a:rPr lang="zh-CN" altLang="en-US">
+                    <a:noFill/>
+                  </a:rPr>
+                  <a:t> </a:t>
+                </a:r>
+              </a:p>
+            </p:txBody>
+          </p:sp>
+        </mc:Fallback>
+      </mc:AlternateContent>
     </p:spTree>
     <p:extLst>
       <p:ext uri="{BB962C8B-B14F-4D97-AF65-F5344CB8AC3E}">
-        <p14:creationId xmlns:p14="http://schemas.microsoft.com/office/powerpoint/2010/main" val="1830605874"/>
+        <p14:creationId xmlns:p14="http://schemas.microsoft.com/office/powerpoint/2010/main" val="763490190"/>
       </p:ext>
     </p:extLst>
   </p:cSld>
@@ -11595,104 +11733,55 @@
                     <m:sSub>
                       <m:sSubPr>
                         <m:ctrlPr>
-                          <a:rPr lang="ar-AE" i="1" smtClean="0">
+                          <a:rPr lang="en-US" i="1">
                             <a:latin typeface="Cambria Math" panose="02040503050406030204" pitchFamily="18" charset="0"/>
                           </a:rPr>
                         </m:ctrlPr>
                       </m:sSubPr>
                       <m:e>
-                        <m:sSub>
-                          <m:sSubPr>
-                            <m:ctrlPr>
-                              <a:rPr lang="en-US" i="1">
-                                <a:latin typeface="Cambria Math" panose="02040503050406030204" pitchFamily="18" charset="0"/>
-                              </a:rPr>
-                            </m:ctrlPr>
-                          </m:sSubPr>
-                          <m:e>
-                            <m:r>
-                              <a:rPr lang="en-US" i="1">
-                                <a:latin typeface="Cambria Math" panose="02040503050406030204" pitchFamily="18" charset="0"/>
-                              </a:rPr>
-                              <m:t>𝑡</m:t>
-                            </m:r>
-                          </m:e>
-                          <m:sub>
-                            <m:r>
-                              <a:rPr lang="ar-AE" i="1">
-                                <a:latin typeface="Cambria Math" panose="02040503050406030204" pitchFamily="18" charset="0"/>
-                              </a:rPr>
-                              <m:t>𝑛</m:t>
-                            </m:r>
-                          </m:sub>
-                        </m:sSub>
                         <m:r>
                           <a:rPr lang="en-US" i="1">
                             <a:latin typeface="Cambria Math" panose="02040503050406030204" pitchFamily="18" charset="0"/>
                           </a:rPr>
-                          <m:t>=</m:t>
+                          <m:t>𝜏</m:t>
+                        </m:r>
+                      </m:e>
+                      <m:sub>
+                        <m:r>
+                          <a:rPr lang="en-US" i="1">
+                            <a:latin typeface="Cambria Math" panose="02040503050406030204" pitchFamily="18" charset="0"/>
+                          </a:rPr>
+                          <m:t>𝑛</m:t>
                         </m:r>
                         <m:r>
                           <a:rPr lang="en-US" i="1">
                             <a:latin typeface="Cambria Math" panose="02040503050406030204" pitchFamily="18" charset="0"/>
                           </a:rPr>
-                          <m:t>𝛼</m:t>
+                          <m:t>+1</m:t>
                         </m:r>
-                        <m:sSub>
-                          <m:sSubPr>
-                            <m:ctrlPr>
-                              <a:rPr lang="ar-AE" i="1">
-                                <a:latin typeface="Cambria Math" panose="02040503050406030204" pitchFamily="18" charset="0"/>
-                              </a:rPr>
-                            </m:ctrlPr>
-                          </m:sSubPr>
-                          <m:e>
-                            <m:r>
-                              <a:rPr lang="ar-AE" i="1">
-                                <a:latin typeface="Cambria Math" panose="02040503050406030204" pitchFamily="18" charset="0"/>
-                              </a:rPr>
-                              <m:t>𝑥</m:t>
-                            </m:r>
-                          </m:e>
-                          <m:sub>
-                            <m:r>
-                              <a:rPr lang="ar-AE" i="1">
-                                <a:latin typeface="Cambria Math" panose="02040503050406030204" pitchFamily="18" charset="0"/>
-                              </a:rPr>
-                              <m:t>𝑛</m:t>
-                            </m:r>
-                          </m:sub>
-                        </m:sSub>
-                        <m:r>
+                      </m:sub>
+                    </m:sSub>
+                    <m:r>
+                      <a:rPr lang="en-US" i="1">
+                        <a:latin typeface="Cambria Math" panose="02040503050406030204" pitchFamily="18" charset="0"/>
+                      </a:rPr>
+                      <m:t>=</m:t>
+                    </m:r>
+                    <m:r>
+                      <a:rPr lang="en-US" b="0" i="1" smtClean="0">
+                        <a:latin typeface="Cambria Math" panose="02040503050406030204" pitchFamily="18" charset="0"/>
+                      </a:rPr>
+                      <m:t>𝛼</m:t>
+                    </m:r>
+                    <m:sSub>
+                      <m:sSubPr>
+                        <m:ctrlPr>
                           <a:rPr lang="en-US" i="1">
                             <a:latin typeface="Cambria Math" panose="02040503050406030204" pitchFamily="18" charset="0"/>
                           </a:rPr>
-                          <m:t>+(</m:t>
-                        </m:r>
-                        <m:r>
-                          <a:rPr lang="en-US" i="1">
-                            <a:latin typeface="Cambria Math" panose="02040503050406030204" pitchFamily="18" charset="0"/>
-                          </a:rPr>
-                          <m:t>1</m:t>
-                        </m:r>
-                        <m:r>
-                          <a:rPr lang="en-US" i="1">
-                            <a:latin typeface="Cambria Math" panose="02040503050406030204" pitchFamily="18" charset="0"/>
-                          </a:rPr>
-                          <m:t>−</m:t>
-                        </m:r>
-                        <m:r>
-                          <a:rPr lang="en-US" i="1">
-                            <a:latin typeface="Cambria Math" panose="02040503050406030204" pitchFamily="18" charset="0"/>
-                          </a:rPr>
-                          <m:t>𝛼</m:t>
-                        </m:r>
-                        <m:r>
-                          <a:rPr lang="en-US" i="1">
-                            <a:latin typeface="Cambria Math" panose="02040503050406030204" pitchFamily="18" charset="0"/>
-                          </a:rPr>
-                          <m:t>)</m:t>
-                        </m:r>
+                        </m:ctrlPr>
+                      </m:sSubPr>
+                      <m:e>
                         <m:r>
                           <a:rPr lang="en-US" i="1">
                             <a:latin typeface="Cambria Math" panose="02040503050406030204" pitchFamily="18" charset="0"/>
@@ -11702,22 +11791,53 @@
                       </m:e>
                       <m:sub>
                         <m:r>
-                          <a:rPr lang="ar-AE" i="1">
+                          <a:rPr lang="en-US" i="1">
                             <a:latin typeface="Cambria Math" panose="02040503050406030204" pitchFamily="18" charset="0"/>
                           </a:rPr>
                           <m:t>𝑛</m:t>
                         </m:r>
-                        <m:r>
-                          <a:rPr lang="ar-AE">
+                      </m:sub>
+                    </m:sSub>
+                    <m:r>
+                      <a:rPr lang="en-US" i="1">
+                        <a:latin typeface="Cambria Math" panose="02040503050406030204" pitchFamily="18" charset="0"/>
+                      </a:rPr>
+                      <m:t>+(1−</m:t>
+                    </m:r>
+                    <m:r>
+                      <a:rPr lang="en-US" altLang="zh-CN" i="1">
+                        <a:latin typeface="Cambria Math" panose="02040503050406030204" pitchFamily="18" charset="0"/>
+                      </a:rPr>
+                      <m:t>𝛼</m:t>
+                    </m:r>
+                    <m:r>
+                      <a:rPr lang="en-US" i="1">
+                        <a:latin typeface="Cambria Math" panose="02040503050406030204" pitchFamily="18" charset="0"/>
+                      </a:rPr>
+                      <m:t>)</m:t>
+                    </m:r>
+                    <m:sSub>
+                      <m:sSubPr>
+                        <m:ctrlPr>
+                          <a:rPr lang="en-US" i="1">
                             <a:latin typeface="Cambria Math" panose="02040503050406030204" pitchFamily="18" charset="0"/>
                           </a:rPr>
-                          <m:t>−</m:t>
-                        </m:r>
+                        </m:ctrlPr>
+                      </m:sSubPr>
+                      <m:e>
                         <m:r>
-                          <a:rPr lang="ar-AE">
+                          <a:rPr lang="en-US" i="1">
                             <a:latin typeface="Cambria Math" panose="02040503050406030204" pitchFamily="18" charset="0"/>
                           </a:rPr>
-                          <m:t>1</m:t>
+                          <m:t>𝜏</m:t>
+                        </m:r>
+                      </m:e>
+                      <m:sub>
+                        <m:r>
+                          <a:rPr lang="en-US" i="1">
+                            <a:latin typeface="Cambria Math" panose="02040503050406030204" pitchFamily="18" charset="0"/>
+                          </a:rPr>
+                          <m:t>𝑛</m:t>
                         </m:r>
                       </m:sub>
                     </m:sSub>
@@ -11733,7 +11853,7 @@
                   <a:rPr lang="en-US" altLang="ko-KR" dirty="0">
                     <a:sym typeface="Symbol" panose="05050102010706020507" pitchFamily="18" charset="2"/>
                   </a:rPr>
-                  <a:t>t</a:t>
+                  <a:t></a:t>
                 </a:r>
                 <a:r>
                   <a:rPr lang="en-US" altLang="ko-KR" sz="2800" baseline="-25000" dirty="0">
@@ -11755,7 +11875,23 @@
                   <a:rPr lang="en-US" altLang="ko-KR" sz="2800" dirty="0">
                     <a:sym typeface="Symbol" panose="05050102010706020507" pitchFamily="18" charset="2"/>
                   </a:rPr>
-                  <a:t>x</a:t>
+                  <a:t>t</a:t>
+                </a:r>
+                <a:r>
+                  <a:rPr lang="en-US" altLang="ko-KR" sz="2800" baseline="-25000" dirty="0">
+                    <a:sym typeface="Symbol" panose="05050102010706020507" pitchFamily="18" charset="2"/>
+                  </a:rPr>
+                  <a:t>0</a:t>
+                </a:r>
+                <a:r>
+                  <a:rPr lang="en-GB" dirty="0"/>
+                  <a:t>, </a:t>
+                </a:r>
+                <a:r>
+                  <a:rPr lang="en-US" altLang="ko-KR" sz="2800" dirty="0">
+                    <a:sym typeface="Symbol" panose="05050102010706020507" pitchFamily="18" charset="2"/>
+                  </a:rPr>
+                  <a:t>t</a:t>
                 </a:r>
                 <a:r>
                   <a:rPr lang="en-US" altLang="ko-KR" sz="2800" baseline="-25000" dirty="0">
@@ -11771,7 +11907,7 @@
                   <a:rPr lang="en-US" altLang="ko-KR" sz="2800" dirty="0">
                     <a:sym typeface="Symbol" panose="05050102010706020507" pitchFamily="18" charset="2"/>
                   </a:rPr>
-                  <a:t>x</a:t>
+                  <a:t>t</a:t>
                 </a:r>
                 <a:r>
                   <a:rPr lang="en-US" altLang="ko-KR" sz="2800" baseline="-25000" dirty="0">
@@ -11787,7 +11923,7 @@
                   <a:rPr lang="en-US" altLang="ko-KR" sz="2800" dirty="0">
                     <a:sym typeface="Symbol" panose="05050102010706020507" pitchFamily="18" charset="2"/>
                   </a:rPr>
-                  <a:t>x</a:t>
+                  <a:t>t</a:t>
                 </a:r>
                 <a:r>
                   <a:rPr lang="en-US" altLang="ko-KR" sz="2800" baseline="-25000" dirty="0">
@@ -11797,29 +11933,13 @@
                 </a:r>
                 <a:r>
                   <a:rPr lang="en-GB" dirty="0"/>
-                  <a:t>, </a:t>
-                </a:r>
-                <a:r>
-                  <a:rPr lang="en-US" altLang="ko-KR" sz="2800" dirty="0">
-                    <a:sym typeface="Symbol" panose="05050102010706020507" pitchFamily="18" charset="2"/>
-                  </a:rPr>
-                  <a:t>x</a:t>
-                </a:r>
-                <a:r>
-                  <a:rPr lang="en-US" altLang="ko-KR" sz="2800" baseline="-25000" dirty="0">
-                    <a:sym typeface="Symbol" panose="05050102010706020507" pitchFamily="18" charset="2"/>
-                  </a:rPr>
-                  <a:t>4</a:t>
-                </a:r>
-                <a:r>
-                  <a:rPr lang="en-GB" dirty="0"/>
                   <a:t> are 4, 8, 6 and 7, respectively. Given α = 0.5. Compute the predicted burst times </a:t>
                 </a:r>
                 <a:r>
                   <a:rPr lang="en-US" altLang="ko-KR" sz="2800" dirty="0">
                     <a:sym typeface="Symbol" panose="05050102010706020507" pitchFamily="18" charset="2"/>
                   </a:rPr>
-                  <a:t>t</a:t>
+                  <a:t></a:t>
                 </a:r>
                 <a:r>
                   <a:rPr lang="en-US" altLang="ko-KR" sz="2800" baseline="-25000" dirty="0">
@@ -11831,7 +11951,7 @@
                   <a:rPr lang="en-US" altLang="ko-KR" sz="2800" dirty="0">
                     <a:sym typeface="Symbol" panose="05050102010706020507" pitchFamily="18" charset="2"/>
                   </a:rPr>
-                  <a:t>, t</a:t>
+                  <a:t>, </a:t>
                 </a:r>
                 <a:r>
                   <a:rPr lang="en-US" altLang="ko-KR" sz="2800" baseline="-25000" dirty="0">
@@ -11843,7 +11963,7 @@
                   <a:rPr lang="en-US" altLang="ko-KR" sz="2800" dirty="0">
                     <a:sym typeface="Symbol" panose="05050102010706020507" pitchFamily="18" charset="2"/>
                   </a:rPr>
-                  <a:t>, t</a:t>
+                  <a:t>, </a:t>
                 </a:r>
                 <a:r>
                   <a:rPr lang="en-US" altLang="ko-KR" sz="2800" baseline="-25000" dirty="0">
@@ -11855,29 +11975,30 @@
                   <a:rPr lang="en-US" altLang="ko-KR" sz="2800" dirty="0">
                     <a:sym typeface="Symbol" panose="05050102010706020507" pitchFamily="18" charset="2"/>
                   </a:rPr>
-                  <a:t>, t</a:t>
+                  <a:t>, </a:t>
                 </a:r>
                 <a:r>
                   <a:rPr lang="en-US" altLang="ko-KR" sz="2800" baseline="-25000" dirty="0">
                     <a:sym typeface="Symbol" panose="05050102010706020507" pitchFamily="18" charset="2"/>
                   </a:rPr>
-                  <a:t>4. </a:t>
+                  <a:t>4.</a:t>
+                </a:r>
+              </a:p>
+              <a:p>
+                <a:pPr lvl="1"/>
+                <a:r>
+                  <a:rPr lang="en-US" altLang="ko-KR" baseline="-25000" dirty="0">
+                    <a:sym typeface="Symbol" panose="05050102010706020507" pitchFamily="18" charset="2"/>
+                  </a:rPr>
+                  <a:t> </a:t>
                 </a:r>
                 <a:r>
-                  <a:rPr lang="en-US" altLang="ko-KR" sz="2800" dirty="0">
+                  <a:rPr lang="en-US" altLang="ko-KR" dirty="0">
                     <a:sym typeface="Symbol" panose="05050102010706020507" pitchFamily="18" charset="2"/>
                   </a:rPr>
                   <a:t>(It is best if you can bring a calculator. But if you do not have one, just writing out the following formulas is OK.)</a:t>
                 </a:r>
-                <a:endParaRPr lang="en-US" altLang="ko-KR" sz="2800" baseline="-25000" dirty="0">
-                  <a:sym typeface="Symbol" panose="05050102010706020507" pitchFamily="18" charset="2"/>
-                </a:endParaRPr>
-              </a:p>
-              <a:p>
-                <a:pPr marL="0" indent="0">
-                  <a:buNone/>
-                </a:pPr>
-                <a:endParaRPr lang="en-US" altLang="ko-KR" sz="2800" baseline="-25000" dirty="0">
+                <a:endParaRPr lang="en-US" altLang="ko-KR" baseline="-25000" dirty="0">
                   <a:sym typeface="Symbol" panose="05050102010706020507" pitchFamily="18" charset="2"/>
                 </a:endParaRPr>
               </a:p>
@@ -11977,7 +12098,7 @@
               <a:blipFill>
                 <a:blip r:embed="rId2"/>
                 <a:stretch>
-                  <a:fillRect l="-1211" t="-2148"/>
+                  <a:fillRect l="-1211" t="-2148" r="-577"/>
                 </a:stretch>
               </a:blipFill>
             </p:spPr>
@@ -11986,7 +12107,7 @@
               <a:lstStyle/>
               <a:p>
                 <a:r>
-                  <a:rPr lang="en-US">
+                  <a:rPr lang="zh-CN" altLang="en-US">
                     <a:noFill/>
                   </a:rPr>
                   <a:t> </a:t>
@@ -17206,7 +17327,7 @@
           </a:ln>
           <a:extLst>
             <a:ext uri="{AF507438-7753-43e0-B8FC-AC1667EBCBE1}">
-              <a14:hiddenEffects xmlns:a14="http://schemas.microsoft.com/office/drawing/2010/main" xmlns="">
+              <a14:hiddenEffects xmlns="" xmlns:a14="http://schemas.microsoft.com/office/drawing/2010/main">
                 <a:effectLst>
                   <a:outerShdw dist="35921" dir="2700000" algn="ctr" rotWithShape="0">
                     <a:schemeClr val="bg2"/>
@@ -17314,7 +17435,7 @@
           </a:ln>
           <a:extLst>
             <a:ext uri="{AF507438-7753-43e0-B8FC-AC1667EBCBE1}">
-              <a14:hiddenEffects xmlns:a14="http://schemas.microsoft.com/office/drawing/2010/main" xmlns="">
+              <a14:hiddenEffects xmlns="" xmlns:a14="http://schemas.microsoft.com/office/drawing/2010/main">
                 <a:effectLst>
                   <a:outerShdw dist="35921" dir="2700000" algn="ctr" rotWithShape="0">
                     <a:schemeClr val="bg2"/>
@@ -17422,7 +17543,7 @@
           </a:ln>
           <a:extLst>
             <a:ext uri="{AF507438-7753-43e0-B8FC-AC1667EBCBE1}">
-              <a14:hiddenEffects xmlns:a14="http://schemas.microsoft.com/office/drawing/2010/main" xmlns="">
+              <a14:hiddenEffects xmlns="" xmlns:a14="http://schemas.microsoft.com/office/drawing/2010/main">
                 <a:effectLst>
                   <a:outerShdw dist="35921" dir="2700000" algn="ctr" rotWithShape="0">
                     <a:schemeClr val="bg2"/>
@@ -23387,7 +23508,7 @@
           </a:ln>
           <a:extLst>
             <a:ext uri="{AF507438-7753-43e0-B8FC-AC1667EBCBE1}">
-              <a14:hiddenEffects xmlns:a14="http://schemas.microsoft.com/office/drawing/2010/main" xmlns="">
+              <a14:hiddenEffects xmlns="" xmlns:a14="http://schemas.microsoft.com/office/drawing/2010/main">
                 <a:effectLst>
                   <a:outerShdw dist="35921" dir="2700000" algn="ctr" rotWithShape="0">
                     <a:schemeClr val="bg2"/>
@@ -23495,7 +23616,7 @@
           </a:ln>
           <a:extLst>
             <a:ext uri="{AF507438-7753-43e0-B8FC-AC1667EBCBE1}">
-              <a14:hiddenEffects xmlns:a14="http://schemas.microsoft.com/office/drawing/2010/main" xmlns="">
+              <a14:hiddenEffects xmlns="" xmlns:a14="http://schemas.microsoft.com/office/drawing/2010/main">
                 <a:effectLst>
                   <a:outerShdw dist="35921" dir="2700000" algn="ctr" rotWithShape="0">
                     <a:schemeClr val="bg2"/>
@@ -23603,7 +23724,7 @@
           </a:ln>
           <a:extLst>
             <a:ext uri="{AF507438-7753-43e0-B8FC-AC1667EBCBE1}">
-              <a14:hiddenEffects xmlns:a14="http://schemas.microsoft.com/office/drawing/2010/main" xmlns="">
+              <a14:hiddenEffects xmlns="" xmlns:a14="http://schemas.microsoft.com/office/drawing/2010/main">
                 <a:effectLst>
                   <a:outerShdw dist="35921" dir="2700000" algn="ctr" rotWithShape="0">
                     <a:schemeClr val="bg2"/>
@@ -23711,7 +23832,7 @@
           </a:ln>
           <a:extLst>
             <a:ext uri="{AF507438-7753-43e0-B8FC-AC1667EBCBE1}">
-              <a14:hiddenEffects xmlns:a14="http://schemas.microsoft.com/office/drawing/2010/main" xmlns="">
+              <a14:hiddenEffects xmlns="" xmlns:a14="http://schemas.microsoft.com/office/drawing/2010/main">
                 <a:effectLst>
                   <a:outerShdw dist="35921" dir="2700000" algn="ctr" rotWithShape="0">
                     <a:schemeClr val="bg2"/>
@@ -25277,7 +25398,7 @@
           </a:ln>
           <a:extLst>
             <a:ext uri="{AF507438-7753-43e0-B8FC-AC1667EBCBE1}">
-              <a14:hiddenEffects xmlns:a14="http://schemas.microsoft.com/office/drawing/2010/main" xmlns="">
+              <a14:hiddenEffects xmlns="" xmlns:a14="http://schemas.microsoft.com/office/drawing/2010/main">
                 <a:effectLst>
                   <a:outerShdw dist="35921" dir="2700000" algn="ctr" rotWithShape="0">
                     <a:schemeClr val="bg2"/>
@@ -25385,7 +25506,7 @@
           </a:ln>
           <a:extLst>
             <a:ext uri="{AF507438-7753-43e0-B8FC-AC1667EBCBE1}">
-              <a14:hiddenEffects xmlns:a14="http://schemas.microsoft.com/office/drawing/2010/main" xmlns="">
+              <a14:hiddenEffects xmlns="" xmlns:a14="http://schemas.microsoft.com/office/drawing/2010/main">
                 <a:effectLst>
                   <a:outerShdw dist="35921" dir="2700000" algn="ctr" rotWithShape="0">
                     <a:schemeClr val="bg2"/>
@@ -25493,7 +25614,7 @@
           </a:ln>
           <a:extLst>
             <a:ext uri="{AF507438-7753-43e0-B8FC-AC1667EBCBE1}">
-              <a14:hiddenEffects xmlns:a14="http://schemas.microsoft.com/office/drawing/2010/main" xmlns="">
+              <a14:hiddenEffects xmlns="" xmlns:a14="http://schemas.microsoft.com/office/drawing/2010/main">
                 <a:effectLst>
                   <a:outerShdw dist="35921" dir="2700000" algn="ctr" rotWithShape="0">
                     <a:schemeClr val="bg2"/>
@@ -25601,7 +25722,7 @@
           </a:ln>
           <a:extLst>
             <a:ext uri="{AF507438-7753-43e0-B8FC-AC1667EBCBE1}">
-              <a14:hiddenEffects xmlns:a14="http://schemas.microsoft.com/office/drawing/2010/main" xmlns="">
+              <a14:hiddenEffects xmlns="" xmlns:a14="http://schemas.microsoft.com/office/drawing/2010/main">
                 <a:effectLst>
                   <a:outerShdw dist="35921" dir="2700000" algn="ctr" rotWithShape="0">
                     <a:schemeClr val="bg2"/>
@@ -25705,17 +25826,17 @@
           <a:effectLst/>
           <a:extLst>
             <a:ext uri="{FAA26D3D-D897-4be2-8F04-BA451C77F1D7}">
-              <ma14:placeholderFlag xmlns="" xmlns:ma14="http://schemas.microsoft.com/office/mac/drawingml/2011/main" val="1"/>
+              <ma14:placeholderFlag xmlns:ma14="http://schemas.microsoft.com/office/mac/drawingml/2011/main" xmlns="" val="1"/>
             </a:ext>
             <a:ext uri="{909E8E84-426E-40dd-AFC4-6F175D3DCCD1}">
-              <a14:hiddenFill xmlns="" xmlns:a14="http://schemas.microsoft.com/office/drawing/2010/main">
+              <a14:hiddenFill xmlns:a14="http://schemas.microsoft.com/office/drawing/2010/main" xmlns="">
                 <a:solidFill>
                   <a:schemeClr val="bg1"/>
                 </a:solidFill>
               </a14:hiddenFill>
             </a:ext>
             <a:ext uri="{91240B29-F687-4f45-9708-019B960494DF}">
-              <a14:hiddenLine xmlns="" xmlns:a14="http://schemas.microsoft.com/office/drawing/2010/main" w="12700">
+              <a14:hiddenLine xmlns:a14="http://schemas.microsoft.com/office/drawing/2010/main" xmlns="" w="12700">
                 <a:pattFill prst="narHorz">
                   <a:fgClr>
                     <a:schemeClr val="tx1"/>
@@ -25730,7 +25851,7 @@
               </a14:hiddenLine>
             </a:ext>
             <a:ext uri="{AF507438-7753-43e0-B8FC-AC1667EBCBE1}">
-              <a14:hiddenEffects xmlns="" xmlns:a14="http://schemas.microsoft.com/office/drawing/2010/main">
+              <a14:hiddenEffects xmlns:a14="http://schemas.microsoft.com/office/drawing/2010/main" xmlns="">
                 <a:effectLst>
                   <a:outerShdw blurRad="63500" dist="38099" dir="2700000" algn="ctr" rotWithShape="0">
                     <a:schemeClr val="bg2">
@@ -26230,7 +26351,7 @@
         <a:effectLst/>
         <a:extLst>
           <a:ext uri="{AF507438-7753-43e0-B8FC-AC1667EBCBE1}">
-            <a14:hiddenEffects xmlns="" xmlns:a14="http://schemas.microsoft.com/office/drawing/2010/main">
+            <a14:hiddenEffects xmlns:a14="http://schemas.microsoft.com/office/drawing/2010/main" xmlns="">
               <a:effectLst>
                 <a:outerShdw dist="35921" dir="2700000" algn="ctr" rotWithShape="0">
                   <a:schemeClr val="bg2"/>
@@ -26303,7 +26424,7 @@
         <a:effectLst/>
         <a:extLst>
           <a:ext uri="{AF507438-7753-43e0-B8FC-AC1667EBCBE1}">
-            <a14:hiddenEffects xmlns="" xmlns:a14="http://schemas.microsoft.com/office/drawing/2010/main">
+            <a14:hiddenEffects xmlns:a14="http://schemas.microsoft.com/office/drawing/2010/main" xmlns="">
               <a:effectLst>
                 <a:outerShdw dist="35921" dir="2700000" algn="ctr" rotWithShape="0">
                   <a:schemeClr val="bg2"/>
